--- a/ppt/1. selasa/2. bahasa inggris.pptx
+++ b/ppt/1. selasa/2. bahasa inggris.pptx
@@ -5,7 +5,7 @@
     <p:sldMasterId id="2147483648" r:id="rId1"/>
   </p:sldMasterIdLst>
   <p:notesMasterIdLst>
-    <p:notesMasterId r:id="rId10"/>
+    <p:notesMasterId r:id="rId26"/>
   </p:notesMasterIdLst>
   <p:sldIdLst>
     <p:sldId id="256" r:id="rId2"/>
@@ -16,6 +16,22 @@
     <p:sldId id="261" r:id="rId7"/>
     <p:sldId id="262" r:id="rId8"/>
     <p:sldId id="263" r:id="rId9"/>
+    <p:sldId id="264" r:id="rId10"/>
+    <p:sldId id="265" r:id="rId11"/>
+    <p:sldId id="266" r:id="rId12"/>
+    <p:sldId id="267" r:id="rId13"/>
+    <p:sldId id="268" r:id="rId14"/>
+    <p:sldId id="269" r:id="rId15"/>
+    <p:sldId id="270" r:id="rId16"/>
+    <p:sldId id="271" r:id="rId17"/>
+    <p:sldId id="272" r:id="rId18"/>
+    <p:sldId id="273" r:id="rId19"/>
+    <p:sldId id="274" r:id="rId20"/>
+    <p:sldId id="275" r:id="rId21"/>
+    <p:sldId id="276" r:id="rId22"/>
+    <p:sldId id="277" r:id="rId23"/>
+    <p:sldId id="278" r:id="rId24"/>
+    <p:sldId id="279" r:id="rId25"/>
   </p:sldIdLst>
   <p:sldSz cx="12192000" cy="6858000"/>
   <p:notesSz cx="6858000" cy="9144000"/>
@@ -3769,6 +3785,1306 @@
 </p:sld>
 </file>
 
+<file path=ppt/slides/slide10.xml><?xml version="1.0" encoding="utf-8"?>
+<p:sld xmlns:a="http://schemas.openxmlformats.org/drawingml/2006/main" xmlns:r="http://schemas.openxmlformats.org/officeDocument/2006/relationships" xmlns:p="http://schemas.openxmlformats.org/presentationml/2006/main">
+  <p:cSld>
+    <p:spTree>
+      <p:nvGrpSpPr>
+        <p:cNvPr id="1" name=""/>
+        <p:cNvGrpSpPr/>
+        <p:nvPr/>
+      </p:nvGrpSpPr>
+      <p:grpSpPr>
+        <a:xfrm>
+          <a:off x="0" y="0"/>
+          <a:ext cx="0" cy="0"/>
+          <a:chOff x="0" y="0"/>
+          <a:chExt cx="0" cy="0"/>
+        </a:xfrm>
+      </p:grpSpPr>
+      <p:sp>
+        <p:nvSpPr>
+          <p:cNvPr id="2" name="Title 1">
+            <a:extLst>
+              <a:ext uri="{FF2B5EF4-FFF2-40B4-BE49-F238E27FC236}">
+                <a16:creationId xmlns:a16="http://schemas.microsoft.com/office/drawing/2014/main" id="{3105A310-F6C9-42C5-8659-4F56739BAEC2}"/>
+              </a:ext>
+            </a:extLst>
+          </p:cNvPr>
+          <p:cNvSpPr>
+            <a:spLocks noGrp="1"/>
+          </p:cNvSpPr>
+          <p:nvPr>
+            <p:ph type="title"/>
+          </p:nvPr>
+        </p:nvSpPr>
+        <p:spPr/>
+        <p:txBody>
+          <a:bodyPr/>
+          <a:lstStyle/>
+          <a:p>
+            <a:endParaRPr lang="en-US"/>
+          </a:p>
+        </p:txBody>
+      </p:sp>
+      <p:sp>
+        <p:nvSpPr>
+          <p:cNvPr id="3" name="Content Placeholder 2">
+            <a:extLst>
+              <a:ext uri="{FF2B5EF4-FFF2-40B4-BE49-F238E27FC236}">
+                <a16:creationId xmlns:a16="http://schemas.microsoft.com/office/drawing/2014/main" id="{85071AE1-689D-47F9-8C68-7357761CD9C3}"/>
+              </a:ext>
+            </a:extLst>
+          </p:cNvPr>
+          <p:cNvSpPr>
+            <a:spLocks noGrp="1"/>
+          </p:cNvSpPr>
+          <p:nvPr>
+            <p:ph idx="1"/>
+          </p:nvPr>
+        </p:nvSpPr>
+        <p:spPr/>
+        <p:txBody>
+          <a:bodyPr/>
+          <a:lstStyle/>
+          <a:p>
+            <a:endParaRPr lang="en-US"/>
+          </a:p>
+        </p:txBody>
+      </p:sp>
+      <p:pic>
+        <p:nvPicPr>
+          <p:cNvPr id="4" name="Picture 3">
+            <a:extLst>
+              <a:ext uri="{FF2B5EF4-FFF2-40B4-BE49-F238E27FC236}">
+                <a16:creationId xmlns:a16="http://schemas.microsoft.com/office/drawing/2014/main" id="{F5D3D4EF-288A-4CED-8F3B-E361D5F80D32}"/>
+              </a:ext>
+            </a:extLst>
+          </p:cNvPr>
+          <p:cNvPicPr>
+            <a:picLocks noChangeAspect="1"/>
+          </p:cNvPicPr>
+          <p:nvPr/>
+        </p:nvPicPr>
+        <p:blipFill>
+          <a:blip r:embed="rId3"/>
+          <a:stretch>
+            <a:fillRect/>
+          </a:stretch>
+        </p:blipFill>
+        <p:spPr>
+          <a:xfrm>
+            <a:off x="0" y="2834040"/>
+            <a:ext cx="12192000" cy="1189919"/>
+          </a:xfrm>
+          <a:prstGeom prst="rect">
+            <a:avLst/>
+          </a:prstGeom>
+        </p:spPr>
+      </p:pic>
+    </p:spTree>
+    <p:extLst>
+      <p:ext uri="{BB962C8B-B14F-4D97-AF65-F5344CB8AC3E}">
+        <p14:creationId xmlns:p14="http://schemas.microsoft.com/office/powerpoint/2010/main" val="4289821031"/>
+      </p:ext>
+    </p:extLst>
+  </p:cSld>
+  <p:clrMapOvr>
+    <a:masterClrMapping/>
+  </p:clrMapOvr>
+  <mc:AlternateContent xmlns:mc="http://schemas.openxmlformats.org/markup-compatibility/2006">
+    <mc:Choice xmlns:p14="http://schemas.microsoft.com/office/powerpoint/2010/main" Requires="p14">
+      <p:transition p14:dur="10" advTm="30000">
+        <p:sndAc>
+          <p:stSnd>
+            <p:snd r:embed="rId2" name="click.wav"/>
+          </p:stSnd>
+        </p:sndAc>
+      </p:transition>
+    </mc:Choice>
+    <mc:Fallback>
+      <p:transition advTm="30000">
+        <p:sndAc>
+          <p:stSnd>
+            <p:snd r:embed="rId2" name="click.wav"/>
+          </p:stSnd>
+        </p:sndAc>
+      </p:transition>
+    </mc:Fallback>
+  </mc:AlternateContent>
+</p:sld>
+</file>
+
+<file path=ppt/slides/slide11.xml><?xml version="1.0" encoding="utf-8"?>
+<p:sld xmlns:a="http://schemas.openxmlformats.org/drawingml/2006/main" xmlns:r="http://schemas.openxmlformats.org/officeDocument/2006/relationships" xmlns:p="http://schemas.openxmlformats.org/presentationml/2006/main">
+  <p:cSld>
+    <p:spTree>
+      <p:nvGrpSpPr>
+        <p:cNvPr id="1" name=""/>
+        <p:cNvGrpSpPr/>
+        <p:nvPr/>
+      </p:nvGrpSpPr>
+      <p:grpSpPr>
+        <a:xfrm>
+          <a:off x="0" y="0"/>
+          <a:ext cx="0" cy="0"/>
+          <a:chOff x="0" y="0"/>
+          <a:chExt cx="0" cy="0"/>
+        </a:xfrm>
+      </p:grpSpPr>
+      <p:sp>
+        <p:nvSpPr>
+          <p:cNvPr id="2" name="Title 1">
+            <a:extLst>
+              <a:ext uri="{FF2B5EF4-FFF2-40B4-BE49-F238E27FC236}">
+                <a16:creationId xmlns:a16="http://schemas.microsoft.com/office/drawing/2014/main" id="{3105A310-F6C9-42C5-8659-4F56739BAEC2}"/>
+              </a:ext>
+            </a:extLst>
+          </p:cNvPr>
+          <p:cNvSpPr>
+            <a:spLocks noGrp="1"/>
+          </p:cNvSpPr>
+          <p:nvPr>
+            <p:ph type="title"/>
+          </p:nvPr>
+        </p:nvSpPr>
+        <p:spPr/>
+        <p:txBody>
+          <a:bodyPr/>
+          <a:lstStyle/>
+          <a:p>
+            <a:endParaRPr lang="en-US"/>
+          </a:p>
+        </p:txBody>
+      </p:sp>
+      <p:sp>
+        <p:nvSpPr>
+          <p:cNvPr id="3" name="Content Placeholder 2">
+            <a:extLst>
+              <a:ext uri="{FF2B5EF4-FFF2-40B4-BE49-F238E27FC236}">
+                <a16:creationId xmlns:a16="http://schemas.microsoft.com/office/drawing/2014/main" id="{85071AE1-689D-47F9-8C68-7357761CD9C3}"/>
+              </a:ext>
+            </a:extLst>
+          </p:cNvPr>
+          <p:cNvSpPr>
+            <a:spLocks noGrp="1"/>
+          </p:cNvSpPr>
+          <p:nvPr>
+            <p:ph idx="1"/>
+          </p:nvPr>
+        </p:nvSpPr>
+        <p:spPr/>
+        <p:txBody>
+          <a:bodyPr/>
+          <a:lstStyle/>
+          <a:p>
+            <a:endParaRPr lang="en-US"/>
+          </a:p>
+        </p:txBody>
+      </p:sp>
+      <p:pic>
+        <p:nvPicPr>
+          <p:cNvPr id="5" name="Picture 4">
+            <a:extLst>
+              <a:ext uri="{FF2B5EF4-FFF2-40B4-BE49-F238E27FC236}">
+                <a16:creationId xmlns:a16="http://schemas.microsoft.com/office/drawing/2014/main" id="{31D29AC4-59D7-4D7F-A092-F7990C411210}"/>
+              </a:ext>
+            </a:extLst>
+          </p:cNvPr>
+          <p:cNvPicPr>
+            <a:picLocks noChangeAspect="1"/>
+          </p:cNvPicPr>
+          <p:nvPr/>
+        </p:nvPicPr>
+        <p:blipFill>
+          <a:blip r:embed="rId3"/>
+          <a:stretch>
+            <a:fillRect/>
+          </a:stretch>
+        </p:blipFill>
+        <p:spPr>
+          <a:xfrm>
+            <a:off x="0" y="2473948"/>
+            <a:ext cx="12192000" cy="1910104"/>
+          </a:xfrm>
+          <a:prstGeom prst="rect">
+            <a:avLst/>
+          </a:prstGeom>
+        </p:spPr>
+      </p:pic>
+    </p:spTree>
+    <p:extLst>
+      <p:ext uri="{BB962C8B-B14F-4D97-AF65-F5344CB8AC3E}">
+        <p14:creationId xmlns:p14="http://schemas.microsoft.com/office/powerpoint/2010/main" val="2959869011"/>
+      </p:ext>
+    </p:extLst>
+  </p:cSld>
+  <p:clrMapOvr>
+    <a:masterClrMapping/>
+  </p:clrMapOvr>
+  <mc:AlternateContent xmlns:mc="http://schemas.openxmlformats.org/markup-compatibility/2006">
+    <mc:Choice xmlns:p14="http://schemas.microsoft.com/office/powerpoint/2010/main" Requires="p14">
+      <p:transition p14:dur="10" advTm="30000">
+        <p:sndAc>
+          <p:stSnd>
+            <p:snd r:embed="rId2" name="click.wav"/>
+          </p:stSnd>
+        </p:sndAc>
+      </p:transition>
+    </mc:Choice>
+    <mc:Fallback>
+      <p:transition advTm="30000">
+        <p:sndAc>
+          <p:stSnd>
+            <p:snd r:embed="rId2" name="click.wav"/>
+          </p:stSnd>
+        </p:sndAc>
+      </p:transition>
+    </mc:Fallback>
+  </mc:AlternateContent>
+</p:sld>
+</file>
+
+<file path=ppt/slides/slide12.xml><?xml version="1.0" encoding="utf-8"?>
+<p:sld xmlns:a="http://schemas.openxmlformats.org/drawingml/2006/main" xmlns:r="http://schemas.openxmlformats.org/officeDocument/2006/relationships" xmlns:p="http://schemas.openxmlformats.org/presentationml/2006/main">
+  <p:cSld>
+    <p:spTree>
+      <p:nvGrpSpPr>
+        <p:cNvPr id="1" name=""/>
+        <p:cNvGrpSpPr/>
+        <p:nvPr/>
+      </p:nvGrpSpPr>
+      <p:grpSpPr>
+        <a:xfrm>
+          <a:off x="0" y="0"/>
+          <a:ext cx="0" cy="0"/>
+          <a:chOff x="0" y="0"/>
+          <a:chExt cx="0" cy="0"/>
+        </a:xfrm>
+      </p:grpSpPr>
+      <p:sp>
+        <p:nvSpPr>
+          <p:cNvPr id="2" name="Title 1">
+            <a:extLst>
+              <a:ext uri="{FF2B5EF4-FFF2-40B4-BE49-F238E27FC236}">
+                <a16:creationId xmlns:a16="http://schemas.microsoft.com/office/drawing/2014/main" id="{3105A310-F6C9-42C5-8659-4F56739BAEC2}"/>
+              </a:ext>
+            </a:extLst>
+          </p:cNvPr>
+          <p:cNvSpPr>
+            <a:spLocks noGrp="1"/>
+          </p:cNvSpPr>
+          <p:nvPr>
+            <p:ph type="title"/>
+          </p:nvPr>
+        </p:nvSpPr>
+        <p:spPr/>
+        <p:txBody>
+          <a:bodyPr/>
+          <a:lstStyle/>
+          <a:p>
+            <a:endParaRPr lang="en-US"/>
+          </a:p>
+        </p:txBody>
+      </p:sp>
+      <p:sp>
+        <p:nvSpPr>
+          <p:cNvPr id="3" name="Content Placeholder 2">
+            <a:extLst>
+              <a:ext uri="{FF2B5EF4-FFF2-40B4-BE49-F238E27FC236}">
+                <a16:creationId xmlns:a16="http://schemas.microsoft.com/office/drawing/2014/main" id="{85071AE1-689D-47F9-8C68-7357761CD9C3}"/>
+              </a:ext>
+            </a:extLst>
+          </p:cNvPr>
+          <p:cNvSpPr>
+            <a:spLocks noGrp="1"/>
+          </p:cNvSpPr>
+          <p:nvPr>
+            <p:ph idx="1"/>
+          </p:nvPr>
+        </p:nvSpPr>
+        <p:spPr/>
+        <p:txBody>
+          <a:bodyPr/>
+          <a:lstStyle/>
+          <a:p>
+            <a:endParaRPr lang="en-US"/>
+          </a:p>
+        </p:txBody>
+      </p:sp>
+      <p:pic>
+        <p:nvPicPr>
+          <p:cNvPr id="4" name="Picture 3">
+            <a:extLst>
+              <a:ext uri="{FF2B5EF4-FFF2-40B4-BE49-F238E27FC236}">
+                <a16:creationId xmlns:a16="http://schemas.microsoft.com/office/drawing/2014/main" id="{F2D6AAC1-9489-458D-9DED-176C9DA4C0AF}"/>
+              </a:ext>
+            </a:extLst>
+          </p:cNvPr>
+          <p:cNvPicPr>
+            <a:picLocks noChangeAspect="1"/>
+          </p:cNvPicPr>
+          <p:nvPr/>
+        </p:nvPicPr>
+        <p:blipFill>
+          <a:blip r:embed="rId3"/>
+          <a:stretch>
+            <a:fillRect/>
+          </a:stretch>
+        </p:blipFill>
+        <p:spPr>
+          <a:xfrm>
+            <a:off x="0" y="328354"/>
+            <a:ext cx="12192000" cy="6201291"/>
+          </a:xfrm>
+          <a:prstGeom prst="rect">
+            <a:avLst/>
+          </a:prstGeom>
+        </p:spPr>
+      </p:pic>
+    </p:spTree>
+    <p:extLst>
+      <p:ext uri="{BB962C8B-B14F-4D97-AF65-F5344CB8AC3E}">
+        <p14:creationId xmlns:p14="http://schemas.microsoft.com/office/powerpoint/2010/main" val="1678766007"/>
+      </p:ext>
+    </p:extLst>
+  </p:cSld>
+  <p:clrMapOvr>
+    <a:masterClrMapping/>
+  </p:clrMapOvr>
+  <mc:AlternateContent xmlns:mc="http://schemas.openxmlformats.org/markup-compatibility/2006">
+    <mc:Choice xmlns:p14="http://schemas.microsoft.com/office/powerpoint/2010/main" Requires="p14">
+      <p:transition p14:dur="10" advTm="30000">
+        <p:sndAc>
+          <p:stSnd>
+            <p:snd r:embed="rId2" name="click.wav"/>
+          </p:stSnd>
+        </p:sndAc>
+      </p:transition>
+    </mc:Choice>
+    <mc:Fallback>
+      <p:transition advTm="30000">
+        <p:sndAc>
+          <p:stSnd>
+            <p:snd r:embed="rId2" name="click.wav"/>
+          </p:stSnd>
+        </p:sndAc>
+      </p:transition>
+    </mc:Fallback>
+  </mc:AlternateContent>
+</p:sld>
+</file>
+
+<file path=ppt/slides/slide13.xml><?xml version="1.0" encoding="utf-8"?>
+<p:sld xmlns:a="http://schemas.openxmlformats.org/drawingml/2006/main" xmlns:r="http://schemas.openxmlformats.org/officeDocument/2006/relationships" xmlns:p="http://schemas.openxmlformats.org/presentationml/2006/main">
+  <p:cSld>
+    <p:spTree>
+      <p:nvGrpSpPr>
+        <p:cNvPr id="1" name=""/>
+        <p:cNvGrpSpPr/>
+        <p:nvPr/>
+      </p:nvGrpSpPr>
+      <p:grpSpPr>
+        <a:xfrm>
+          <a:off x="0" y="0"/>
+          <a:ext cx="0" cy="0"/>
+          <a:chOff x="0" y="0"/>
+          <a:chExt cx="0" cy="0"/>
+        </a:xfrm>
+      </p:grpSpPr>
+      <p:sp>
+        <p:nvSpPr>
+          <p:cNvPr id="2" name="Title 1">
+            <a:extLst>
+              <a:ext uri="{FF2B5EF4-FFF2-40B4-BE49-F238E27FC236}">
+                <a16:creationId xmlns:a16="http://schemas.microsoft.com/office/drawing/2014/main" id="{3105A310-F6C9-42C5-8659-4F56739BAEC2}"/>
+              </a:ext>
+            </a:extLst>
+          </p:cNvPr>
+          <p:cNvSpPr>
+            <a:spLocks noGrp="1"/>
+          </p:cNvSpPr>
+          <p:nvPr>
+            <p:ph type="title"/>
+          </p:nvPr>
+        </p:nvSpPr>
+        <p:spPr/>
+        <p:txBody>
+          <a:bodyPr/>
+          <a:lstStyle/>
+          <a:p>
+            <a:endParaRPr lang="en-US"/>
+          </a:p>
+        </p:txBody>
+      </p:sp>
+      <p:sp>
+        <p:nvSpPr>
+          <p:cNvPr id="3" name="Content Placeholder 2">
+            <a:extLst>
+              <a:ext uri="{FF2B5EF4-FFF2-40B4-BE49-F238E27FC236}">
+                <a16:creationId xmlns:a16="http://schemas.microsoft.com/office/drawing/2014/main" id="{85071AE1-689D-47F9-8C68-7357761CD9C3}"/>
+              </a:ext>
+            </a:extLst>
+          </p:cNvPr>
+          <p:cNvSpPr>
+            <a:spLocks noGrp="1"/>
+          </p:cNvSpPr>
+          <p:nvPr>
+            <p:ph idx="1"/>
+          </p:nvPr>
+        </p:nvSpPr>
+        <p:spPr/>
+        <p:txBody>
+          <a:bodyPr/>
+          <a:lstStyle/>
+          <a:p>
+            <a:endParaRPr lang="en-US"/>
+          </a:p>
+        </p:txBody>
+      </p:sp>
+      <p:pic>
+        <p:nvPicPr>
+          <p:cNvPr id="5" name="Picture 4">
+            <a:extLst>
+              <a:ext uri="{FF2B5EF4-FFF2-40B4-BE49-F238E27FC236}">
+                <a16:creationId xmlns:a16="http://schemas.microsoft.com/office/drawing/2014/main" id="{492D5DDB-7223-4407-8591-7DCF0B339E83}"/>
+              </a:ext>
+            </a:extLst>
+          </p:cNvPr>
+          <p:cNvPicPr>
+            <a:picLocks noChangeAspect="1"/>
+          </p:cNvPicPr>
+          <p:nvPr/>
+        </p:nvPicPr>
+        <p:blipFill>
+          <a:blip r:embed="rId3"/>
+          <a:stretch>
+            <a:fillRect/>
+          </a:stretch>
+        </p:blipFill>
+        <p:spPr>
+          <a:xfrm>
+            <a:off x="0" y="1810047"/>
+            <a:ext cx="12192000" cy="3237906"/>
+          </a:xfrm>
+          <a:prstGeom prst="rect">
+            <a:avLst/>
+          </a:prstGeom>
+        </p:spPr>
+      </p:pic>
+    </p:spTree>
+    <p:extLst>
+      <p:ext uri="{BB962C8B-B14F-4D97-AF65-F5344CB8AC3E}">
+        <p14:creationId xmlns:p14="http://schemas.microsoft.com/office/powerpoint/2010/main" val="3750544305"/>
+      </p:ext>
+    </p:extLst>
+  </p:cSld>
+  <p:clrMapOvr>
+    <a:masterClrMapping/>
+  </p:clrMapOvr>
+  <mc:AlternateContent xmlns:mc="http://schemas.openxmlformats.org/markup-compatibility/2006">
+    <mc:Choice xmlns:p14="http://schemas.microsoft.com/office/powerpoint/2010/main" Requires="p14">
+      <p:transition p14:dur="10" advTm="30000">
+        <p:sndAc>
+          <p:stSnd>
+            <p:snd r:embed="rId2" name="click.wav"/>
+          </p:stSnd>
+        </p:sndAc>
+      </p:transition>
+    </mc:Choice>
+    <mc:Fallback>
+      <p:transition advTm="30000">
+        <p:sndAc>
+          <p:stSnd>
+            <p:snd r:embed="rId2" name="click.wav"/>
+          </p:stSnd>
+        </p:sndAc>
+      </p:transition>
+    </mc:Fallback>
+  </mc:AlternateContent>
+</p:sld>
+</file>
+
+<file path=ppt/slides/slide14.xml><?xml version="1.0" encoding="utf-8"?>
+<p:sld xmlns:a="http://schemas.openxmlformats.org/drawingml/2006/main" xmlns:r="http://schemas.openxmlformats.org/officeDocument/2006/relationships" xmlns:p="http://schemas.openxmlformats.org/presentationml/2006/main">
+  <p:cSld>
+    <p:spTree>
+      <p:nvGrpSpPr>
+        <p:cNvPr id="1" name=""/>
+        <p:cNvGrpSpPr/>
+        <p:nvPr/>
+      </p:nvGrpSpPr>
+      <p:grpSpPr>
+        <a:xfrm>
+          <a:off x="0" y="0"/>
+          <a:ext cx="0" cy="0"/>
+          <a:chOff x="0" y="0"/>
+          <a:chExt cx="0" cy="0"/>
+        </a:xfrm>
+      </p:grpSpPr>
+      <p:sp>
+        <p:nvSpPr>
+          <p:cNvPr id="2" name="Title 1">
+            <a:extLst>
+              <a:ext uri="{FF2B5EF4-FFF2-40B4-BE49-F238E27FC236}">
+                <a16:creationId xmlns:a16="http://schemas.microsoft.com/office/drawing/2014/main" id="{3105A310-F6C9-42C5-8659-4F56739BAEC2}"/>
+              </a:ext>
+            </a:extLst>
+          </p:cNvPr>
+          <p:cNvSpPr>
+            <a:spLocks noGrp="1"/>
+          </p:cNvSpPr>
+          <p:nvPr>
+            <p:ph type="title"/>
+          </p:nvPr>
+        </p:nvSpPr>
+        <p:spPr/>
+        <p:txBody>
+          <a:bodyPr/>
+          <a:lstStyle/>
+          <a:p>
+            <a:endParaRPr lang="en-US"/>
+          </a:p>
+        </p:txBody>
+      </p:sp>
+      <p:sp>
+        <p:nvSpPr>
+          <p:cNvPr id="3" name="Content Placeholder 2">
+            <a:extLst>
+              <a:ext uri="{FF2B5EF4-FFF2-40B4-BE49-F238E27FC236}">
+                <a16:creationId xmlns:a16="http://schemas.microsoft.com/office/drawing/2014/main" id="{85071AE1-689D-47F9-8C68-7357761CD9C3}"/>
+              </a:ext>
+            </a:extLst>
+          </p:cNvPr>
+          <p:cNvSpPr>
+            <a:spLocks noGrp="1"/>
+          </p:cNvSpPr>
+          <p:nvPr>
+            <p:ph idx="1"/>
+          </p:nvPr>
+        </p:nvSpPr>
+        <p:spPr/>
+        <p:txBody>
+          <a:bodyPr/>
+          <a:lstStyle/>
+          <a:p>
+            <a:endParaRPr lang="en-US"/>
+          </a:p>
+        </p:txBody>
+      </p:sp>
+      <p:pic>
+        <p:nvPicPr>
+          <p:cNvPr id="4" name="Picture 3">
+            <a:extLst>
+              <a:ext uri="{FF2B5EF4-FFF2-40B4-BE49-F238E27FC236}">
+                <a16:creationId xmlns:a16="http://schemas.microsoft.com/office/drawing/2014/main" id="{88CDF581-210B-4CAA-B8DE-30CE4909E2A9}"/>
+              </a:ext>
+            </a:extLst>
+          </p:cNvPr>
+          <p:cNvPicPr>
+            <a:picLocks noChangeAspect="1"/>
+          </p:cNvPicPr>
+          <p:nvPr/>
+        </p:nvPicPr>
+        <p:blipFill>
+          <a:blip r:embed="rId3"/>
+          <a:stretch>
+            <a:fillRect/>
+          </a:stretch>
+        </p:blipFill>
+        <p:spPr>
+          <a:xfrm>
+            <a:off x="0" y="2655414"/>
+            <a:ext cx="12192000" cy="1547172"/>
+          </a:xfrm>
+          <a:prstGeom prst="rect">
+            <a:avLst/>
+          </a:prstGeom>
+        </p:spPr>
+      </p:pic>
+    </p:spTree>
+    <p:extLst>
+      <p:ext uri="{BB962C8B-B14F-4D97-AF65-F5344CB8AC3E}">
+        <p14:creationId xmlns:p14="http://schemas.microsoft.com/office/powerpoint/2010/main" val="1744776585"/>
+      </p:ext>
+    </p:extLst>
+  </p:cSld>
+  <p:clrMapOvr>
+    <a:masterClrMapping/>
+  </p:clrMapOvr>
+  <mc:AlternateContent xmlns:mc="http://schemas.openxmlformats.org/markup-compatibility/2006">
+    <mc:Choice xmlns:p14="http://schemas.microsoft.com/office/powerpoint/2010/main" Requires="p14">
+      <p:transition p14:dur="10" advTm="30000">
+        <p:sndAc>
+          <p:stSnd>
+            <p:snd r:embed="rId2" name="click.wav"/>
+          </p:stSnd>
+        </p:sndAc>
+      </p:transition>
+    </mc:Choice>
+    <mc:Fallback>
+      <p:transition advTm="30000">
+        <p:sndAc>
+          <p:stSnd>
+            <p:snd r:embed="rId2" name="click.wav"/>
+          </p:stSnd>
+        </p:sndAc>
+      </p:transition>
+    </mc:Fallback>
+  </mc:AlternateContent>
+</p:sld>
+</file>
+
+<file path=ppt/slides/slide15.xml><?xml version="1.0" encoding="utf-8"?>
+<p:sld xmlns:a="http://schemas.openxmlformats.org/drawingml/2006/main" xmlns:r="http://schemas.openxmlformats.org/officeDocument/2006/relationships" xmlns:p="http://schemas.openxmlformats.org/presentationml/2006/main">
+  <p:cSld>
+    <p:spTree>
+      <p:nvGrpSpPr>
+        <p:cNvPr id="1" name=""/>
+        <p:cNvGrpSpPr/>
+        <p:nvPr/>
+      </p:nvGrpSpPr>
+      <p:grpSpPr>
+        <a:xfrm>
+          <a:off x="0" y="0"/>
+          <a:ext cx="0" cy="0"/>
+          <a:chOff x="0" y="0"/>
+          <a:chExt cx="0" cy="0"/>
+        </a:xfrm>
+      </p:grpSpPr>
+      <p:sp>
+        <p:nvSpPr>
+          <p:cNvPr id="2" name="Title 1">
+            <a:extLst>
+              <a:ext uri="{FF2B5EF4-FFF2-40B4-BE49-F238E27FC236}">
+                <a16:creationId xmlns:a16="http://schemas.microsoft.com/office/drawing/2014/main" id="{3105A310-F6C9-42C5-8659-4F56739BAEC2}"/>
+              </a:ext>
+            </a:extLst>
+          </p:cNvPr>
+          <p:cNvSpPr>
+            <a:spLocks noGrp="1"/>
+          </p:cNvSpPr>
+          <p:nvPr>
+            <p:ph type="title"/>
+          </p:nvPr>
+        </p:nvSpPr>
+        <p:spPr/>
+        <p:txBody>
+          <a:bodyPr/>
+          <a:lstStyle/>
+          <a:p>
+            <a:endParaRPr lang="en-US"/>
+          </a:p>
+        </p:txBody>
+      </p:sp>
+      <p:sp>
+        <p:nvSpPr>
+          <p:cNvPr id="3" name="Content Placeholder 2">
+            <a:extLst>
+              <a:ext uri="{FF2B5EF4-FFF2-40B4-BE49-F238E27FC236}">
+                <a16:creationId xmlns:a16="http://schemas.microsoft.com/office/drawing/2014/main" id="{85071AE1-689D-47F9-8C68-7357761CD9C3}"/>
+              </a:ext>
+            </a:extLst>
+          </p:cNvPr>
+          <p:cNvSpPr>
+            <a:spLocks noGrp="1"/>
+          </p:cNvSpPr>
+          <p:nvPr>
+            <p:ph idx="1"/>
+          </p:nvPr>
+        </p:nvSpPr>
+        <p:spPr/>
+        <p:txBody>
+          <a:bodyPr/>
+          <a:lstStyle/>
+          <a:p>
+            <a:endParaRPr lang="en-US"/>
+          </a:p>
+        </p:txBody>
+      </p:sp>
+      <p:pic>
+        <p:nvPicPr>
+          <p:cNvPr id="5" name="Picture 4">
+            <a:extLst>
+              <a:ext uri="{FF2B5EF4-FFF2-40B4-BE49-F238E27FC236}">
+                <a16:creationId xmlns:a16="http://schemas.microsoft.com/office/drawing/2014/main" id="{A9547F1D-841A-4D5B-AD94-5A4E1F026671}"/>
+              </a:ext>
+            </a:extLst>
+          </p:cNvPr>
+          <p:cNvPicPr>
+            <a:picLocks noChangeAspect="1"/>
+          </p:cNvPicPr>
+          <p:nvPr/>
+        </p:nvPicPr>
+        <p:blipFill>
+          <a:blip r:embed="rId3"/>
+          <a:stretch>
+            <a:fillRect/>
+          </a:stretch>
+        </p:blipFill>
+        <p:spPr>
+          <a:xfrm>
+            <a:off x="0" y="695164"/>
+            <a:ext cx="12192000" cy="5467671"/>
+          </a:xfrm>
+          <a:prstGeom prst="rect">
+            <a:avLst/>
+          </a:prstGeom>
+        </p:spPr>
+      </p:pic>
+    </p:spTree>
+    <p:extLst>
+      <p:ext uri="{BB962C8B-B14F-4D97-AF65-F5344CB8AC3E}">
+        <p14:creationId xmlns:p14="http://schemas.microsoft.com/office/powerpoint/2010/main" val="1785876683"/>
+      </p:ext>
+    </p:extLst>
+  </p:cSld>
+  <p:clrMapOvr>
+    <a:masterClrMapping/>
+  </p:clrMapOvr>
+  <mc:AlternateContent xmlns:mc="http://schemas.openxmlformats.org/markup-compatibility/2006">
+    <mc:Choice xmlns:p14="http://schemas.microsoft.com/office/powerpoint/2010/main" Requires="p14">
+      <p:transition p14:dur="10" advTm="30000">
+        <p:sndAc>
+          <p:stSnd>
+            <p:snd r:embed="rId2" name="click.wav"/>
+          </p:stSnd>
+        </p:sndAc>
+      </p:transition>
+    </mc:Choice>
+    <mc:Fallback>
+      <p:transition advTm="30000">
+        <p:sndAc>
+          <p:stSnd>
+            <p:snd r:embed="rId2" name="click.wav"/>
+          </p:stSnd>
+        </p:sndAc>
+      </p:transition>
+    </mc:Fallback>
+  </mc:AlternateContent>
+</p:sld>
+</file>
+
+<file path=ppt/slides/slide16.xml><?xml version="1.0" encoding="utf-8"?>
+<p:sld xmlns:a="http://schemas.openxmlformats.org/drawingml/2006/main" xmlns:r="http://schemas.openxmlformats.org/officeDocument/2006/relationships" xmlns:p="http://schemas.openxmlformats.org/presentationml/2006/main">
+  <p:cSld>
+    <p:spTree>
+      <p:nvGrpSpPr>
+        <p:cNvPr id="1" name=""/>
+        <p:cNvGrpSpPr/>
+        <p:nvPr/>
+      </p:nvGrpSpPr>
+      <p:grpSpPr>
+        <a:xfrm>
+          <a:off x="0" y="0"/>
+          <a:ext cx="0" cy="0"/>
+          <a:chOff x="0" y="0"/>
+          <a:chExt cx="0" cy="0"/>
+        </a:xfrm>
+      </p:grpSpPr>
+      <p:sp>
+        <p:nvSpPr>
+          <p:cNvPr id="2" name="Title 1">
+            <a:extLst>
+              <a:ext uri="{FF2B5EF4-FFF2-40B4-BE49-F238E27FC236}">
+                <a16:creationId xmlns:a16="http://schemas.microsoft.com/office/drawing/2014/main" id="{3105A310-F6C9-42C5-8659-4F56739BAEC2}"/>
+              </a:ext>
+            </a:extLst>
+          </p:cNvPr>
+          <p:cNvSpPr>
+            <a:spLocks noGrp="1"/>
+          </p:cNvSpPr>
+          <p:nvPr>
+            <p:ph type="title"/>
+          </p:nvPr>
+        </p:nvSpPr>
+        <p:spPr/>
+        <p:txBody>
+          <a:bodyPr/>
+          <a:lstStyle/>
+          <a:p>
+            <a:endParaRPr lang="en-US"/>
+          </a:p>
+        </p:txBody>
+      </p:sp>
+      <p:sp>
+        <p:nvSpPr>
+          <p:cNvPr id="3" name="Content Placeholder 2">
+            <a:extLst>
+              <a:ext uri="{FF2B5EF4-FFF2-40B4-BE49-F238E27FC236}">
+                <a16:creationId xmlns:a16="http://schemas.microsoft.com/office/drawing/2014/main" id="{85071AE1-689D-47F9-8C68-7357761CD9C3}"/>
+              </a:ext>
+            </a:extLst>
+          </p:cNvPr>
+          <p:cNvSpPr>
+            <a:spLocks noGrp="1"/>
+          </p:cNvSpPr>
+          <p:nvPr>
+            <p:ph idx="1"/>
+          </p:nvPr>
+        </p:nvSpPr>
+        <p:spPr/>
+        <p:txBody>
+          <a:bodyPr/>
+          <a:lstStyle/>
+          <a:p>
+            <a:endParaRPr lang="en-US"/>
+          </a:p>
+        </p:txBody>
+      </p:sp>
+      <p:pic>
+        <p:nvPicPr>
+          <p:cNvPr id="4" name="Picture 3">
+            <a:extLst>
+              <a:ext uri="{FF2B5EF4-FFF2-40B4-BE49-F238E27FC236}">
+                <a16:creationId xmlns:a16="http://schemas.microsoft.com/office/drawing/2014/main" id="{69C453C4-3E7C-41EA-8F44-F4F436885E2B}"/>
+              </a:ext>
+            </a:extLst>
+          </p:cNvPr>
+          <p:cNvPicPr>
+            <a:picLocks noChangeAspect="1"/>
+          </p:cNvPicPr>
+          <p:nvPr/>
+        </p:nvPicPr>
+        <p:blipFill>
+          <a:blip r:embed="rId3"/>
+          <a:stretch>
+            <a:fillRect/>
+          </a:stretch>
+        </p:blipFill>
+        <p:spPr>
+          <a:xfrm>
+            <a:off x="0" y="2252228"/>
+            <a:ext cx="12192000" cy="2353544"/>
+          </a:xfrm>
+          <a:prstGeom prst="rect">
+            <a:avLst/>
+          </a:prstGeom>
+        </p:spPr>
+      </p:pic>
+    </p:spTree>
+    <p:extLst>
+      <p:ext uri="{BB962C8B-B14F-4D97-AF65-F5344CB8AC3E}">
+        <p14:creationId xmlns:p14="http://schemas.microsoft.com/office/powerpoint/2010/main" val="2585537374"/>
+      </p:ext>
+    </p:extLst>
+  </p:cSld>
+  <p:clrMapOvr>
+    <a:masterClrMapping/>
+  </p:clrMapOvr>
+  <mc:AlternateContent xmlns:mc="http://schemas.openxmlformats.org/markup-compatibility/2006">
+    <mc:Choice xmlns:p14="http://schemas.microsoft.com/office/powerpoint/2010/main" Requires="p14">
+      <p:transition p14:dur="10" advTm="30000">
+        <p:sndAc>
+          <p:stSnd>
+            <p:snd r:embed="rId2" name="click.wav"/>
+          </p:stSnd>
+        </p:sndAc>
+      </p:transition>
+    </mc:Choice>
+    <mc:Fallback>
+      <p:transition advTm="30000">
+        <p:sndAc>
+          <p:stSnd>
+            <p:snd r:embed="rId2" name="click.wav"/>
+          </p:stSnd>
+        </p:sndAc>
+      </p:transition>
+    </mc:Fallback>
+  </mc:AlternateContent>
+</p:sld>
+</file>
+
+<file path=ppt/slides/slide17.xml><?xml version="1.0" encoding="utf-8"?>
+<p:sld xmlns:a="http://schemas.openxmlformats.org/drawingml/2006/main" xmlns:r="http://schemas.openxmlformats.org/officeDocument/2006/relationships" xmlns:p="http://schemas.openxmlformats.org/presentationml/2006/main">
+  <p:cSld>
+    <p:spTree>
+      <p:nvGrpSpPr>
+        <p:cNvPr id="1" name=""/>
+        <p:cNvGrpSpPr/>
+        <p:nvPr/>
+      </p:nvGrpSpPr>
+      <p:grpSpPr>
+        <a:xfrm>
+          <a:off x="0" y="0"/>
+          <a:ext cx="0" cy="0"/>
+          <a:chOff x="0" y="0"/>
+          <a:chExt cx="0" cy="0"/>
+        </a:xfrm>
+      </p:grpSpPr>
+      <p:sp>
+        <p:nvSpPr>
+          <p:cNvPr id="2" name="Title 1">
+            <a:extLst>
+              <a:ext uri="{FF2B5EF4-FFF2-40B4-BE49-F238E27FC236}">
+                <a16:creationId xmlns:a16="http://schemas.microsoft.com/office/drawing/2014/main" id="{3105A310-F6C9-42C5-8659-4F56739BAEC2}"/>
+              </a:ext>
+            </a:extLst>
+          </p:cNvPr>
+          <p:cNvSpPr>
+            <a:spLocks noGrp="1"/>
+          </p:cNvSpPr>
+          <p:nvPr>
+            <p:ph type="title"/>
+          </p:nvPr>
+        </p:nvSpPr>
+        <p:spPr/>
+        <p:txBody>
+          <a:bodyPr/>
+          <a:lstStyle/>
+          <a:p>
+            <a:endParaRPr lang="en-US"/>
+          </a:p>
+        </p:txBody>
+      </p:sp>
+      <p:sp>
+        <p:nvSpPr>
+          <p:cNvPr id="3" name="Content Placeholder 2">
+            <a:extLst>
+              <a:ext uri="{FF2B5EF4-FFF2-40B4-BE49-F238E27FC236}">
+                <a16:creationId xmlns:a16="http://schemas.microsoft.com/office/drawing/2014/main" id="{85071AE1-689D-47F9-8C68-7357761CD9C3}"/>
+              </a:ext>
+            </a:extLst>
+          </p:cNvPr>
+          <p:cNvSpPr>
+            <a:spLocks noGrp="1"/>
+          </p:cNvSpPr>
+          <p:nvPr>
+            <p:ph idx="1"/>
+          </p:nvPr>
+        </p:nvSpPr>
+        <p:spPr/>
+        <p:txBody>
+          <a:bodyPr/>
+          <a:lstStyle/>
+          <a:p>
+            <a:endParaRPr lang="en-US"/>
+          </a:p>
+        </p:txBody>
+      </p:sp>
+      <p:pic>
+        <p:nvPicPr>
+          <p:cNvPr id="5" name="Picture 4">
+            <a:extLst>
+              <a:ext uri="{FF2B5EF4-FFF2-40B4-BE49-F238E27FC236}">
+                <a16:creationId xmlns:a16="http://schemas.microsoft.com/office/drawing/2014/main" id="{BBA3A20E-D483-4CB3-B2ED-0ED7CF6FAF56}"/>
+              </a:ext>
+            </a:extLst>
+          </p:cNvPr>
+          <p:cNvPicPr>
+            <a:picLocks noChangeAspect="1"/>
+          </p:cNvPicPr>
+          <p:nvPr/>
+        </p:nvPicPr>
+        <p:blipFill>
+          <a:blip r:embed="rId3"/>
+          <a:stretch>
+            <a:fillRect/>
+          </a:stretch>
+        </p:blipFill>
+        <p:spPr>
+          <a:xfrm>
+            <a:off x="0" y="1828452"/>
+            <a:ext cx="12192000" cy="3201096"/>
+          </a:xfrm>
+          <a:prstGeom prst="rect">
+            <a:avLst/>
+          </a:prstGeom>
+        </p:spPr>
+      </p:pic>
+    </p:spTree>
+    <p:extLst>
+      <p:ext uri="{BB962C8B-B14F-4D97-AF65-F5344CB8AC3E}">
+        <p14:creationId xmlns:p14="http://schemas.microsoft.com/office/powerpoint/2010/main" val="3778693084"/>
+      </p:ext>
+    </p:extLst>
+  </p:cSld>
+  <p:clrMapOvr>
+    <a:masterClrMapping/>
+  </p:clrMapOvr>
+  <mc:AlternateContent xmlns:mc="http://schemas.openxmlformats.org/markup-compatibility/2006">
+    <mc:Choice xmlns:p14="http://schemas.microsoft.com/office/powerpoint/2010/main" Requires="p14">
+      <p:transition p14:dur="10" advTm="30000">
+        <p:sndAc>
+          <p:stSnd>
+            <p:snd r:embed="rId2" name="click.wav"/>
+          </p:stSnd>
+        </p:sndAc>
+      </p:transition>
+    </mc:Choice>
+    <mc:Fallback>
+      <p:transition advTm="30000">
+        <p:sndAc>
+          <p:stSnd>
+            <p:snd r:embed="rId2" name="click.wav"/>
+          </p:stSnd>
+        </p:sndAc>
+      </p:transition>
+    </mc:Fallback>
+  </mc:AlternateContent>
+</p:sld>
+</file>
+
+<file path=ppt/slides/slide18.xml><?xml version="1.0" encoding="utf-8"?>
+<p:sld xmlns:a="http://schemas.openxmlformats.org/drawingml/2006/main" xmlns:r="http://schemas.openxmlformats.org/officeDocument/2006/relationships" xmlns:p="http://schemas.openxmlformats.org/presentationml/2006/main">
+  <p:cSld>
+    <p:spTree>
+      <p:nvGrpSpPr>
+        <p:cNvPr id="1" name=""/>
+        <p:cNvGrpSpPr/>
+        <p:nvPr/>
+      </p:nvGrpSpPr>
+      <p:grpSpPr>
+        <a:xfrm>
+          <a:off x="0" y="0"/>
+          <a:ext cx="0" cy="0"/>
+          <a:chOff x="0" y="0"/>
+          <a:chExt cx="0" cy="0"/>
+        </a:xfrm>
+      </p:grpSpPr>
+      <p:sp>
+        <p:nvSpPr>
+          <p:cNvPr id="2" name="Title 1">
+            <a:extLst>
+              <a:ext uri="{FF2B5EF4-FFF2-40B4-BE49-F238E27FC236}">
+                <a16:creationId xmlns:a16="http://schemas.microsoft.com/office/drawing/2014/main" id="{3105A310-F6C9-42C5-8659-4F56739BAEC2}"/>
+              </a:ext>
+            </a:extLst>
+          </p:cNvPr>
+          <p:cNvSpPr>
+            <a:spLocks noGrp="1"/>
+          </p:cNvSpPr>
+          <p:nvPr>
+            <p:ph type="title"/>
+          </p:nvPr>
+        </p:nvSpPr>
+        <p:spPr/>
+        <p:txBody>
+          <a:bodyPr/>
+          <a:lstStyle/>
+          <a:p>
+            <a:endParaRPr lang="en-US"/>
+          </a:p>
+        </p:txBody>
+      </p:sp>
+      <p:sp>
+        <p:nvSpPr>
+          <p:cNvPr id="3" name="Content Placeholder 2">
+            <a:extLst>
+              <a:ext uri="{FF2B5EF4-FFF2-40B4-BE49-F238E27FC236}">
+                <a16:creationId xmlns:a16="http://schemas.microsoft.com/office/drawing/2014/main" id="{85071AE1-689D-47F9-8C68-7357761CD9C3}"/>
+              </a:ext>
+            </a:extLst>
+          </p:cNvPr>
+          <p:cNvSpPr>
+            <a:spLocks noGrp="1"/>
+          </p:cNvSpPr>
+          <p:nvPr>
+            <p:ph idx="1"/>
+          </p:nvPr>
+        </p:nvSpPr>
+        <p:spPr/>
+        <p:txBody>
+          <a:bodyPr/>
+          <a:lstStyle/>
+          <a:p>
+            <a:endParaRPr lang="en-US"/>
+          </a:p>
+        </p:txBody>
+      </p:sp>
+      <p:pic>
+        <p:nvPicPr>
+          <p:cNvPr id="4" name="Picture 3">
+            <a:extLst>
+              <a:ext uri="{FF2B5EF4-FFF2-40B4-BE49-F238E27FC236}">
+                <a16:creationId xmlns:a16="http://schemas.microsoft.com/office/drawing/2014/main" id="{EEF54B02-15E3-4E89-A6AC-235C9EE541AC}"/>
+              </a:ext>
+            </a:extLst>
+          </p:cNvPr>
+          <p:cNvPicPr>
+            <a:picLocks noChangeAspect="1"/>
+          </p:cNvPicPr>
+          <p:nvPr/>
+        </p:nvPicPr>
+        <p:blipFill>
+          <a:blip r:embed="rId3"/>
+          <a:stretch>
+            <a:fillRect/>
+          </a:stretch>
+        </p:blipFill>
+        <p:spPr>
+          <a:xfrm>
+            <a:off x="0" y="1733608"/>
+            <a:ext cx="12192000" cy="3390784"/>
+          </a:xfrm>
+          <a:prstGeom prst="rect">
+            <a:avLst/>
+          </a:prstGeom>
+        </p:spPr>
+      </p:pic>
+    </p:spTree>
+    <p:extLst>
+      <p:ext uri="{BB962C8B-B14F-4D97-AF65-F5344CB8AC3E}">
+        <p14:creationId xmlns:p14="http://schemas.microsoft.com/office/powerpoint/2010/main" val="2254110248"/>
+      </p:ext>
+    </p:extLst>
+  </p:cSld>
+  <p:clrMapOvr>
+    <a:masterClrMapping/>
+  </p:clrMapOvr>
+  <mc:AlternateContent xmlns:mc="http://schemas.openxmlformats.org/markup-compatibility/2006">
+    <mc:Choice xmlns:p14="http://schemas.microsoft.com/office/powerpoint/2010/main" Requires="p14">
+      <p:transition p14:dur="10" advTm="30000">
+        <p:sndAc>
+          <p:stSnd>
+            <p:snd r:embed="rId2" name="click.wav"/>
+          </p:stSnd>
+        </p:sndAc>
+      </p:transition>
+    </mc:Choice>
+    <mc:Fallback>
+      <p:transition advTm="30000">
+        <p:sndAc>
+          <p:stSnd>
+            <p:snd r:embed="rId2" name="click.wav"/>
+          </p:stSnd>
+        </p:sndAc>
+      </p:transition>
+    </mc:Fallback>
+  </mc:AlternateContent>
+</p:sld>
+</file>
+
+<file path=ppt/slides/slide19.xml><?xml version="1.0" encoding="utf-8"?>
+<p:sld xmlns:a="http://schemas.openxmlformats.org/drawingml/2006/main" xmlns:r="http://schemas.openxmlformats.org/officeDocument/2006/relationships" xmlns:p="http://schemas.openxmlformats.org/presentationml/2006/main">
+  <p:cSld>
+    <p:spTree>
+      <p:nvGrpSpPr>
+        <p:cNvPr id="1" name=""/>
+        <p:cNvGrpSpPr/>
+        <p:nvPr/>
+      </p:nvGrpSpPr>
+      <p:grpSpPr>
+        <a:xfrm>
+          <a:off x="0" y="0"/>
+          <a:ext cx="0" cy="0"/>
+          <a:chOff x="0" y="0"/>
+          <a:chExt cx="0" cy="0"/>
+        </a:xfrm>
+      </p:grpSpPr>
+      <p:sp>
+        <p:nvSpPr>
+          <p:cNvPr id="2" name="Title 1">
+            <a:extLst>
+              <a:ext uri="{FF2B5EF4-FFF2-40B4-BE49-F238E27FC236}">
+                <a16:creationId xmlns:a16="http://schemas.microsoft.com/office/drawing/2014/main" id="{3105A310-F6C9-42C5-8659-4F56739BAEC2}"/>
+              </a:ext>
+            </a:extLst>
+          </p:cNvPr>
+          <p:cNvSpPr>
+            <a:spLocks noGrp="1"/>
+          </p:cNvSpPr>
+          <p:nvPr>
+            <p:ph type="title"/>
+          </p:nvPr>
+        </p:nvSpPr>
+        <p:spPr/>
+        <p:txBody>
+          <a:bodyPr/>
+          <a:lstStyle/>
+          <a:p>
+            <a:endParaRPr lang="en-US"/>
+          </a:p>
+        </p:txBody>
+      </p:sp>
+      <p:sp>
+        <p:nvSpPr>
+          <p:cNvPr id="3" name="Content Placeholder 2">
+            <a:extLst>
+              <a:ext uri="{FF2B5EF4-FFF2-40B4-BE49-F238E27FC236}">
+                <a16:creationId xmlns:a16="http://schemas.microsoft.com/office/drawing/2014/main" id="{85071AE1-689D-47F9-8C68-7357761CD9C3}"/>
+              </a:ext>
+            </a:extLst>
+          </p:cNvPr>
+          <p:cNvSpPr>
+            <a:spLocks noGrp="1"/>
+          </p:cNvSpPr>
+          <p:nvPr>
+            <p:ph idx="1"/>
+          </p:nvPr>
+        </p:nvSpPr>
+        <p:spPr/>
+        <p:txBody>
+          <a:bodyPr/>
+          <a:lstStyle/>
+          <a:p>
+            <a:endParaRPr lang="en-US"/>
+          </a:p>
+        </p:txBody>
+      </p:sp>
+      <p:pic>
+        <p:nvPicPr>
+          <p:cNvPr id="5" name="Picture 4">
+            <a:extLst>
+              <a:ext uri="{FF2B5EF4-FFF2-40B4-BE49-F238E27FC236}">
+                <a16:creationId xmlns:a16="http://schemas.microsoft.com/office/drawing/2014/main" id="{22EA1DAB-C8D7-4B0C-B588-A002BC2C2DB8}"/>
+              </a:ext>
+            </a:extLst>
+          </p:cNvPr>
+          <p:cNvPicPr>
+            <a:picLocks noChangeAspect="1"/>
+          </p:cNvPicPr>
+          <p:nvPr/>
+        </p:nvPicPr>
+        <p:blipFill>
+          <a:blip r:embed="rId3"/>
+          <a:stretch>
+            <a:fillRect/>
+          </a:stretch>
+        </p:blipFill>
+        <p:spPr>
+          <a:xfrm>
+            <a:off x="496323" y="0"/>
+            <a:ext cx="11199354" cy="6858000"/>
+          </a:xfrm>
+          <a:prstGeom prst="rect">
+            <a:avLst/>
+          </a:prstGeom>
+        </p:spPr>
+      </p:pic>
+    </p:spTree>
+    <p:extLst>
+      <p:ext uri="{BB962C8B-B14F-4D97-AF65-F5344CB8AC3E}">
+        <p14:creationId xmlns:p14="http://schemas.microsoft.com/office/powerpoint/2010/main" val="3050934243"/>
+      </p:ext>
+    </p:extLst>
+  </p:cSld>
+  <p:clrMapOvr>
+    <a:masterClrMapping/>
+  </p:clrMapOvr>
+  <mc:AlternateContent xmlns:mc="http://schemas.openxmlformats.org/markup-compatibility/2006">
+    <mc:Choice xmlns:p14="http://schemas.microsoft.com/office/powerpoint/2010/main" Requires="p14">
+      <p:transition p14:dur="10" advTm="30000">
+        <p:sndAc>
+          <p:stSnd>
+            <p:snd r:embed="rId2" name="click.wav"/>
+          </p:stSnd>
+        </p:sndAc>
+      </p:transition>
+    </mc:Choice>
+    <mc:Fallback>
+      <p:transition advTm="30000">
+        <p:sndAc>
+          <p:stSnd>
+            <p:snd r:embed="rId2" name="click.wav"/>
+          </p:stSnd>
+        </p:sndAc>
+      </p:transition>
+    </mc:Fallback>
+  </mc:AlternateContent>
+</p:sld>
+</file>
+
 <file path=ppt/slides/slide2.xml><?xml version="1.0" encoding="utf-8"?>
 <p:sld xmlns:a="http://schemas.openxmlformats.org/drawingml/2006/main" xmlns:r="http://schemas.openxmlformats.org/officeDocument/2006/relationships" xmlns:p="http://schemas.openxmlformats.org/presentationml/2006/main">
   <p:cSld>
@@ -3891,6 +5207,656 @@
         <p:sndAc>
           <p:stSnd>
             <p:snd r:embed="rId4" name="explode.wav"/>
+          </p:stSnd>
+        </p:sndAc>
+      </p:transition>
+    </mc:Fallback>
+  </mc:AlternateContent>
+</p:sld>
+</file>
+
+<file path=ppt/slides/slide20.xml><?xml version="1.0" encoding="utf-8"?>
+<p:sld xmlns:a="http://schemas.openxmlformats.org/drawingml/2006/main" xmlns:r="http://schemas.openxmlformats.org/officeDocument/2006/relationships" xmlns:p="http://schemas.openxmlformats.org/presentationml/2006/main">
+  <p:cSld>
+    <p:spTree>
+      <p:nvGrpSpPr>
+        <p:cNvPr id="1" name=""/>
+        <p:cNvGrpSpPr/>
+        <p:nvPr/>
+      </p:nvGrpSpPr>
+      <p:grpSpPr>
+        <a:xfrm>
+          <a:off x="0" y="0"/>
+          <a:ext cx="0" cy="0"/>
+          <a:chOff x="0" y="0"/>
+          <a:chExt cx="0" cy="0"/>
+        </a:xfrm>
+      </p:grpSpPr>
+      <p:sp>
+        <p:nvSpPr>
+          <p:cNvPr id="2" name="Title 1">
+            <a:extLst>
+              <a:ext uri="{FF2B5EF4-FFF2-40B4-BE49-F238E27FC236}">
+                <a16:creationId xmlns:a16="http://schemas.microsoft.com/office/drawing/2014/main" id="{3105A310-F6C9-42C5-8659-4F56739BAEC2}"/>
+              </a:ext>
+            </a:extLst>
+          </p:cNvPr>
+          <p:cNvSpPr>
+            <a:spLocks noGrp="1"/>
+          </p:cNvSpPr>
+          <p:nvPr>
+            <p:ph type="title"/>
+          </p:nvPr>
+        </p:nvSpPr>
+        <p:spPr/>
+        <p:txBody>
+          <a:bodyPr/>
+          <a:lstStyle/>
+          <a:p>
+            <a:endParaRPr lang="en-US"/>
+          </a:p>
+        </p:txBody>
+      </p:sp>
+      <p:sp>
+        <p:nvSpPr>
+          <p:cNvPr id="3" name="Content Placeholder 2">
+            <a:extLst>
+              <a:ext uri="{FF2B5EF4-FFF2-40B4-BE49-F238E27FC236}">
+                <a16:creationId xmlns:a16="http://schemas.microsoft.com/office/drawing/2014/main" id="{85071AE1-689D-47F9-8C68-7357761CD9C3}"/>
+              </a:ext>
+            </a:extLst>
+          </p:cNvPr>
+          <p:cNvSpPr>
+            <a:spLocks noGrp="1"/>
+          </p:cNvSpPr>
+          <p:nvPr>
+            <p:ph idx="1"/>
+          </p:nvPr>
+        </p:nvSpPr>
+        <p:spPr/>
+        <p:txBody>
+          <a:bodyPr/>
+          <a:lstStyle/>
+          <a:p>
+            <a:endParaRPr lang="en-US"/>
+          </a:p>
+        </p:txBody>
+      </p:sp>
+      <p:pic>
+        <p:nvPicPr>
+          <p:cNvPr id="4" name="Picture 3">
+            <a:extLst>
+              <a:ext uri="{FF2B5EF4-FFF2-40B4-BE49-F238E27FC236}">
+                <a16:creationId xmlns:a16="http://schemas.microsoft.com/office/drawing/2014/main" id="{FEE9F11D-2732-4D4E-94C5-328D5AC600E1}"/>
+              </a:ext>
+            </a:extLst>
+          </p:cNvPr>
+          <p:cNvPicPr>
+            <a:picLocks noChangeAspect="1"/>
+          </p:cNvPicPr>
+          <p:nvPr/>
+        </p:nvPicPr>
+        <p:blipFill>
+          <a:blip r:embed="rId3"/>
+          <a:stretch>
+            <a:fillRect/>
+          </a:stretch>
+        </p:blipFill>
+        <p:spPr>
+          <a:xfrm>
+            <a:off x="0" y="2081321"/>
+            <a:ext cx="12192000" cy="2695358"/>
+          </a:xfrm>
+          <a:prstGeom prst="rect">
+            <a:avLst/>
+          </a:prstGeom>
+        </p:spPr>
+      </p:pic>
+    </p:spTree>
+    <p:extLst>
+      <p:ext uri="{BB962C8B-B14F-4D97-AF65-F5344CB8AC3E}">
+        <p14:creationId xmlns:p14="http://schemas.microsoft.com/office/powerpoint/2010/main" val="701951626"/>
+      </p:ext>
+    </p:extLst>
+  </p:cSld>
+  <p:clrMapOvr>
+    <a:masterClrMapping/>
+  </p:clrMapOvr>
+  <mc:AlternateContent xmlns:mc="http://schemas.openxmlformats.org/markup-compatibility/2006">
+    <mc:Choice xmlns:p14="http://schemas.microsoft.com/office/powerpoint/2010/main" Requires="p14">
+      <p:transition p14:dur="10" advTm="30000">
+        <p:sndAc>
+          <p:stSnd>
+            <p:snd r:embed="rId2" name="click.wav"/>
+          </p:stSnd>
+        </p:sndAc>
+      </p:transition>
+    </mc:Choice>
+    <mc:Fallback>
+      <p:transition advTm="30000">
+        <p:sndAc>
+          <p:stSnd>
+            <p:snd r:embed="rId2" name="click.wav"/>
+          </p:stSnd>
+        </p:sndAc>
+      </p:transition>
+    </mc:Fallback>
+  </mc:AlternateContent>
+</p:sld>
+</file>
+
+<file path=ppt/slides/slide21.xml><?xml version="1.0" encoding="utf-8"?>
+<p:sld xmlns:a="http://schemas.openxmlformats.org/drawingml/2006/main" xmlns:r="http://schemas.openxmlformats.org/officeDocument/2006/relationships" xmlns:p="http://schemas.openxmlformats.org/presentationml/2006/main">
+  <p:cSld>
+    <p:spTree>
+      <p:nvGrpSpPr>
+        <p:cNvPr id="1" name=""/>
+        <p:cNvGrpSpPr/>
+        <p:nvPr/>
+      </p:nvGrpSpPr>
+      <p:grpSpPr>
+        <a:xfrm>
+          <a:off x="0" y="0"/>
+          <a:ext cx="0" cy="0"/>
+          <a:chOff x="0" y="0"/>
+          <a:chExt cx="0" cy="0"/>
+        </a:xfrm>
+      </p:grpSpPr>
+      <p:sp>
+        <p:nvSpPr>
+          <p:cNvPr id="2" name="Title 1">
+            <a:extLst>
+              <a:ext uri="{FF2B5EF4-FFF2-40B4-BE49-F238E27FC236}">
+                <a16:creationId xmlns:a16="http://schemas.microsoft.com/office/drawing/2014/main" id="{3105A310-F6C9-42C5-8659-4F56739BAEC2}"/>
+              </a:ext>
+            </a:extLst>
+          </p:cNvPr>
+          <p:cNvSpPr>
+            <a:spLocks noGrp="1"/>
+          </p:cNvSpPr>
+          <p:nvPr>
+            <p:ph type="title"/>
+          </p:nvPr>
+        </p:nvSpPr>
+        <p:spPr/>
+        <p:txBody>
+          <a:bodyPr/>
+          <a:lstStyle/>
+          <a:p>
+            <a:endParaRPr lang="en-US"/>
+          </a:p>
+        </p:txBody>
+      </p:sp>
+      <p:sp>
+        <p:nvSpPr>
+          <p:cNvPr id="3" name="Content Placeholder 2">
+            <a:extLst>
+              <a:ext uri="{FF2B5EF4-FFF2-40B4-BE49-F238E27FC236}">
+                <a16:creationId xmlns:a16="http://schemas.microsoft.com/office/drawing/2014/main" id="{85071AE1-689D-47F9-8C68-7357761CD9C3}"/>
+              </a:ext>
+            </a:extLst>
+          </p:cNvPr>
+          <p:cNvSpPr>
+            <a:spLocks noGrp="1"/>
+          </p:cNvSpPr>
+          <p:nvPr>
+            <p:ph idx="1"/>
+          </p:nvPr>
+        </p:nvSpPr>
+        <p:spPr/>
+        <p:txBody>
+          <a:bodyPr/>
+          <a:lstStyle/>
+          <a:p>
+            <a:endParaRPr lang="en-US"/>
+          </a:p>
+        </p:txBody>
+      </p:sp>
+      <p:pic>
+        <p:nvPicPr>
+          <p:cNvPr id="5" name="Picture 4">
+            <a:extLst>
+              <a:ext uri="{FF2B5EF4-FFF2-40B4-BE49-F238E27FC236}">
+                <a16:creationId xmlns:a16="http://schemas.microsoft.com/office/drawing/2014/main" id="{EF539032-E37E-4AC5-B8F8-F262F10A495F}"/>
+              </a:ext>
+            </a:extLst>
+          </p:cNvPr>
+          <p:cNvPicPr>
+            <a:picLocks noChangeAspect="1"/>
+          </p:cNvPicPr>
+          <p:nvPr/>
+        </p:nvPicPr>
+        <p:blipFill>
+          <a:blip r:embed="rId3"/>
+          <a:stretch>
+            <a:fillRect/>
+          </a:stretch>
+        </p:blipFill>
+        <p:spPr>
+          <a:xfrm>
+            <a:off x="0" y="2637707"/>
+            <a:ext cx="12192000" cy="1582586"/>
+          </a:xfrm>
+          <a:prstGeom prst="rect">
+            <a:avLst/>
+          </a:prstGeom>
+        </p:spPr>
+      </p:pic>
+    </p:spTree>
+    <p:extLst>
+      <p:ext uri="{BB962C8B-B14F-4D97-AF65-F5344CB8AC3E}">
+        <p14:creationId xmlns:p14="http://schemas.microsoft.com/office/powerpoint/2010/main" val="4158196873"/>
+      </p:ext>
+    </p:extLst>
+  </p:cSld>
+  <p:clrMapOvr>
+    <a:masterClrMapping/>
+  </p:clrMapOvr>
+  <mc:AlternateContent xmlns:mc="http://schemas.openxmlformats.org/markup-compatibility/2006">
+    <mc:Choice xmlns:p14="http://schemas.microsoft.com/office/powerpoint/2010/main" Requires="p14">
+      <p:transition p14:dur="10" advTm="30000">
+        <p:sndAc>
+          <p:stSnd>
+            <p:snd r:embed="rId2" name="click.wav"/>
+          </p:stSnd>
+        </p:sndAc>
+      </p:transition>
+    </mc:Choice>
+    <mc:Fallback>
+      <p:transition advTm="30000">
+        <p:sndAc>
+          <p:stSnd>
+            <p:snd r:embed="rId2" name="click.wav"/>
+          </p:stSnd>
+        </p:sndAc>
+      </p:transition>
+    </mc:Fallback>
+  </mc:AlternateContent>
+</p:sld>
+</file>
+
+<file path=ppt/slides/slide22.xml><?xml version="1.0" encoding="utf-8"?>
+<p:sld xmlns:a="http://schemas.openxmlformats.org/drawingml/2006/main" xmlns:r="http://schemas.openxmlformats.org/officeDocument/2006/relationships" xmlns:p="http://schemas.openxmlformats.org/presentationml/2006/main">
+  <p:cSld>
+    <p:spTree>
+      <p:nvGrpSpPr>
+        <p:cNvPr id="1" name=""/>
+        <p:cNvGrpSpPr/>
+        <p:nvPr/>
+      </p:nvGrpSpPr>
+      <p:grpSpPr>
+        <a:xfrm>
+          <a:off x="0" y="0"/>
+          <a:ext cx="0" cy="0"/>
+          <a:chOff x="0" y="0"/>
+          <a:chExt cx="0" cy="0"/>
+        </a:xfrm>
+      </p:grpSpPr>
+      <p:sp>
+        <p:nvSpPr>
+          <p:cNvPr id="2" name="Title 1">
+            <a:extLst>
+              <a:ext uri="{FF2B5EF4-FFF2-40B4-BE49-F238E27FC236}">
+                <a16:creationId xmlns:a16="http://schemas.microsoft.com/office/drawing/2014/main" id="{3105A310-F6C9-42C5-8659-4F56739BAEC2}"/>
+              </a:ext>
+            </a:extLst>
+          </p:cNvPr>
+          <p:cNvSpPr>
+            <a:spLocks noGrp="1"/>
+          </p:cNvSpPr>
+          <p:nvPr>
+            <p:ph type="title"/>
+          </p:nvPr>
+        </p:nvSpPr>
+        <p:spPr/>
+        <p:txBody>
+          <a:bodyPr/>
+          <a:lstStyle/>
+          <a:p>
+            <a:endParaRPr lang="en-US"/>
+          </a:p>
+        </p:txBody>
+      </p:sp>
+      <p:sp>
+        <p:nvSpPr>
+          <p:cNvPr id="3" name="Content Placeholder 2">
+            <a:extLst>
+              <a:ext uri="{FF2B5EF4-FFF2-40B4-BE49-F238E27FC236}">
+                <a16:creationId xmlns:a16="http://schemas.microsoft.com/office/drawing/2014/main" id="{85071AE1-689D-47F9-8C68-7357761CD9C3}"/>
+              </a:ext>
+            </a:extLst>
+          </p:cNvPr>
+          <p:cNvSpPr>
+            <a:spLocks noGrp="1"/>
+          </p:cNvSpPr>
+          <p:nvPr>
+            <p:ph idx="1"/>
+          </p:nvPr>
+        </p:nvSpPr>
+        <p:spPr/>
+        <p:txBody>
+          <a:bodyPr/>
+          <a:lstStyle/>
+          <a:p>
+            <a:endParaRPr lang="en-US"/>
+          </a:p>
+        </p:txBody>
+      </p:sp>
+      <p:pic>
+        <p:nvPicPr>
+          <p:cNvPr id="4" name="Picture 3">
+            <a:extLst>
+              <a:ext uri="{FF2B5EF4-FFF2-40B4-BE49-F238E27FC236}">
+                <a16:creationId xmlns:a16="http://schemas.microsoft.com/office/drawing/2014/main" id="{76CD52A4-D92C-4C98-92EC-3F66E241BAB7}"/>
+              </a:ext>
+            </a:extLst>
+          </p:cNvPr>
+          <p:cNvPicPr>
+            <a:picLocks noChangeAspect="1"/>
+          </p:cNvPicPr>
+          <p:nvPr/>
+        </p:nvPicPr>
+        <p:blipFill>
+          <a:blip r:embed="rId3"/>
+          <a:stretch>
+            <a:fillRect/>
+          </a:stretch>
+        </p:blipFill>
+        <p:spPr>
+          <a:xfrm>
+            <a:off x="0" y="2531139"/>
+            <a:ext cx="12192000" cy="1795721"/>
+          </a:xfrm>
+          <a:prstGeom prst="rect">
+            <a:avLst/>
+          </a:prstGeom>
+        </p:spPr>
+      </p:pic>
+    </p:spTree>
+    <p:extLst>
+      <p:ext uri="{BB962C8B-B14F-4D97-AF65-F5344CB8AC3E}">
+        <p14:creationId xmlns:p14="http://schemas.microsoft.com/office/powerpoint/2010/main" val="2910972615"/>
+      </p:ext>
+    </p:extLst>
+  </p:cSld>
+  <p:clrMapOvr>
+    <a:masterClrMapping/>
+  </p:clrMapOvr>
+  <mc:AlternateContent xmlns:mc="http://schemas.openxmlformats.org/markup-compatibility/2006">
+    <mc:Choice xmlns:p14="http://schemas.microsoft.com/office/powerpoint/2010/main" Requires="p14">
+      <p:transition p14:dur="10" advTm="30000">
+        <p:sndAc>
+          <p:stSnd>
+            <p:snd r:embed="rId2" name="click.wav"/>
+          </p:stSnd>
+        </p:sndAc>
+      </p:transition>
+    </mc:Choice>
+    <mc:Fallback>
+      <p:transition advTm="30000">
+        <p:sndAc>
+          <p:stSnd>
+            <p:snd r:embed="rId2" name="click.wav"/>
+          </p:stSnd>
+        </p:sndAc>
+      </p:transition>
+    </mc:Fallback>
+  </mc:AlternateContent>
+</p:sld>
+</file>
+
+<file path=ppt/slides/slide23.xml><?xml version="1.0" encoding="utf-8"?>
+<p:sld xmlns:a="http://schemas.openxmlformats.org/drawingml/2006/main" xmlns:r="http://schemas.openxmlformats.org/officeDocument/2006/relationships" xmlns:p="http://schemas.openxmlformats.org/presentationml/2006/main">
+  <p:cSld>
+    <p:spTree>
+      <p:nvGrpSpPr>
+        <p:cNvPr id="1" name=""/>
+        <p:cNvGrpSpPr/>
+        <p:nvPr/>
+      </p:nvGrpSpPr>
+      <p:grpSpPr>
+        <a:xfrm>
+          <a:off x="0" y="0"/>
+          <a:ext cx="0" cy="0"/>
+          <a:chOff x="0" y="0"/>
+          <a:chExt cx="0" cy="0"/>
+        </a:xfrm>
+      </p:grpSpPr>
+      <p:sp>
+        <p:nvSpPr>
+          <p:cNvPr id="2" name="Title 1">
+            <a:extLst>
+              <a:ext uri="{FF2B5EF4-FFF2-40B4-BE49-F238E27FC236}">
+                <a16:creationId xmlns:a16="http://schemas.microsoft.com/office/drawing/2014/main" id="{3105A310-F6C9-42C5-8659-4F56739BAEC2}"/>
+              </a:ext>
+            </a:extLst>
+          </p:cNvPr>
+          <p:cNvSpPr>
+            <a:spLocks noGrp="1"/>
+          </p:cNvSpPr>
+          <p:nvPr>
+            <p:ph type="title"/>
+          </p:nvPr>
+        </p:nvSpPr>
+        <p:spPr/>
+        <p:txBody>
+          <a:bodyPr/>
+          <a:lstStyle/>
+          <a:p>
+            <a:endParaRPr lang="en-US"/>
+          </a:p>
+        </p:txBody>
+      </p:sp>
+      <p:sp>
+        <p:nvSpPr>
+          <p:cNvPr id="3" name="Content Placeholder 2">
+            <a:extLst>
+              <a:ext uri="{FF2B5EF4-FFF2-40B4-BE49-F238E27FC236}">
+                <a16:creationId xmlns:a16="http://schemas.microsoft.com/office/drawing/2014/main" id="{85071AE1-689D-47F9-8C68-7357761CD9C3}"/>
+              </a:ext>
+            </a:extLst>
+          </p:cNvPr>
+          <p:cNvSpPr>
+            <a:spLocks noGrp="1"/>
+          </p:cNvSpPr>
+          <p:nvPr>
+            <p:ph idx="1"/>
+          </p:nvPr>
+        </p:nvSpPr>
+        <p:spPr/>
+        <p:txBody>
+          <a:bodyPr/>
+          <a:lstStyle/>
+          <a:p>
+            <a:endParaRPr lang="en-US"/>
+          </a:p>
+        </p:txBody>
+      </p:sp>
+      <p:pic>
+        <p:nvPicPr>
+          <p:cNvPr id="5" name="Picture 4">
+            <a:extLst>
+              <a:ext uri="{FF2B5EF4-FFF2-40B4-BE49-F238E27FC236}">
+                <a16:creationId xmlns:a16="http://schemas.microsoft.com/office/drawing/2014/main" id="{43E17AE0-75B6-42F7-851E-B04744E0CC28}"/>
+              </a:ext>
+            </a:extLst>
+          </p:cNvPr>
+          <p:cNvPicPr>
+            <a:picLocks noChangeAspect="1"/>
+          </p:cNvPicPr>
+          <p:nvPr/>
+        </p:nvPicPr>
+        <p:blipFill>
+          <a:blip r:embed="rId3"/>
+          <a:stretch>
+            <a:fillRect/>
+          </a:stretch>
+        </p:blipFill>
+        <p:spPr>
+          <a:xfrm>
+            <a:off x="432745" y="0"/>
+            <a:ext cx="11326510" cy="6858000"/>
+          </a:xfrm>
+          <a:prstGeom prst="rect">
+            <a:avLst/>
+          </a:prstGeom>
+        </p:spPr>
+      </p:pic>
+    </p:spTree>
+    <p:extLst>
+      <p:ext uri="{BB962C8B-B14F-4D97-AF65-F5344CB8AC3E}">
+        <p14:creationId xmlns:p14="http://schemas.microsoft.com/office/powerpoint/2010/main" val="2129603150"/>
+      </p:ext>
+    </p:extLst>
+  </p:cSld>
+  <p:clrMapOvr>
+    <a:masterClrMapping/>
+  </p:clrMapOvr>
+  <mc:AlternateContent xmlns:mc="http://schemas.openxmlformats.org/markup-compatibility/2006">
+    <mc:Choice xmlns:p14="http://schemas.microsoft.com/office/powerpoint/2010/main" Requires="p14">
+      <p:transition p14:dur="10" advTm="30000">
+        <p:sndAc>
+          <p:stSnd>
+            <p:snd r:embed="rId2" name="click.wav"/>
+          </p:stSnd>
+        </p:sndAc>
+      </p:transition>
+    </mc:Choice>
+    <mc:Fallback>
+      <p:transition advTm="30000">
+        <p:sndAc>
+          <p:stSnd>
+            <p:snd r:embed="rId2" name="click.wav"/>
+          </p:stSnd>
+        </p:sndAc>
+      </p:transition>
+    </mc:Fallback>
+  </mc:AlternateContent>
+</p:sld>
+</file>
+
+<file path=ppt/slides/slide24.xml><?xml version="1.0" encoding="utf-8"?>
+<p:sld xmlns:a="http://schemas.openxmlformats.org/drawingml/2006/main" xmlns:r="http://schemas.openxmlformats.org/officeDocument/2006/relationships" xmlns:p="http://schemas.openxmlformats.org/presentationml/2006/main">
+  <p:cSld>
+    <p:spTree>
+      <p:nvGrpSpPr>
+        <p:cNvPr id="1" name=""/>
+        <p:cNvGrpSpPr/>
+        <p:nvPr/>
+      </p:nvGrpSpPr>
+      <p:grpSpPr>
+        <a:xfrm>
+          <a:off x="0" y="0"/>
+          <a:ext cx="0" cy="0"/>
+          <a:chOff x="0" y="0"/>
+          <a:chExt cx="0" cy="0"/>
+        </a:xfrm>
+      </p:grpSpPr>
+      <p:sp>
+        <p:nvSpPr>
+          <p:cNvPr id="2" name="Title 1">
+            <a:extLst>
+              <a:ext uri="{FF2B5EF4-FFF2-40B4-BE49-F238E27FC236}">
+                <a16:creationId xmlns:a16="http://schemas.microsoft.com/office/drawing/2014/main" id="{3105A310-F6C9-42C5-8659-4F56739BAEC2}"/>
+              </a:ext>
+            </a:extLst>
+          </p:cNvPr>
+          <p:cNvSpPr>
+            <a:spLocks noGrp="1"/>
+          </p:cNvSpPr>
+          <p:nvPr>
+            <p:ph type="title"/>
+          </p:nvPr>
+        </p:nvSpPr>
+        <p:spPr/>
+        <p:txBody>
+          <a:bodyPr/>
+          <a:lstStyle/>
+          <a:p>
+            <a:endParaRPr lang="en-US"/>
+          </a:p>
+        </p:txBody>
+      </p:sp>
+      <p:sp>
+        <p:nvSpPr>
+          <p:cNvPr id="3" name="Content Placeholder 2">
+            <a:extLst>
+              <a:ext uri="{FF2B5EF4-FFF2-40B4-BE49-F238E27FC236}">
+                <a16:creationId xmlns:a16="http://schemas.microsoft.com/office/drawing/2014/main" id="{85071AE1-689D-47F9-8C68-7357761CD9C3}"/>
+              </a:ext>
+            </a:extLst>
+          </p:cNvPr>
+          <p:cNvSpPr>
+            <a:spLocks noGrp="1"/>
+          </p:cNvSpPr>
+          <p:nvPr>
+            <p:ph idx="1"/>
+          </p:nvPr>
+        </p:nvSpPr>
+        <p:spPr/>
+        <p:txBody>
+          <a:bodyPr/>
+          <a:lstStyle/>
+          <a:p>
+            <a:endParaRPr lang="en-US"/>
+          </a:p>
+        </p:txBody>
+      </p:sp>
+      <p:pic>
+        <p:nvPicPr>
+          <p:cNvPr id="4" name="Picture 3">
+            <a:extLst>
+              <a:ext uri="{FF2B5EF4-FFF2-40B4-BE49-F238E27FC236}">
+                <a16:creationId xmlns:a16="http://schemas.microsoft.com/office/drawing/2014/main" id="{66016363-2A58-4642-BCEC-0B711A8FF280}"/>
+              </a:ext>
+            </a:extLst>
+          </p:cNvPr>
+          <p:cNvPicPr>
+            <a:picLocks noChangeAspect="1"/>
+          </p:cNvPicPr>
+          <p:nvPr/>
+        </p:nvPicPr>
+        <p:blipFill>
+          <a:blip r:embed="rId3"/>
+          <a:stretch>
+            <a:fillRect/>
+          </a:stretch>
+        </p:blipFill>
+        <p:spPr>
+          <a:xfrm>
+            <a:off x="0" y="2299447"/>
+            <a:ext cx="12192000" cy="2259106"/>
+          </a:xfrm>
+          <a:prstGeom prst="rect">
+            <a:avLst/>
+          </a:prstGeom>
+        </p:spPr>
+      </p:pic>
+    </p:spTree>
+    <p:extLst>
+      <p:ext uri="{BB962C8B-B14F-4D97-AF65-F5344CB8AC3E}">
+        <p14:creationId xmlns:p14="http://schemas.microsoft.com/office/powerpoint/2010/main" val="1564434029"/>
+      </p:ext>
+    </p:extLst>
+  </p:cSld>
+  <p:clrMapOvr>
+    <a:masterClrMapping/>
+  </p:clrMapOvr>
+  <mc:AlternateContent xmlns:mc="http://schemas.openxmlformats.org/markup-compatibility/2006">
+    <mc:Choice xmlns:p14="http://schemas.microsoft.com/office/powerpoint/2010/main" Requires="p14">
+      <p:transition p14:dur="10" advTm="30000">
+        <p:sndAc>
+          <p:stSnd>
+            <p:snd r:embed="rId2" name="click.wav"/>
+          </p:stSnd>
+        </p:sndAc>
+      </p:transition>
+    </mc:Choice>
+    <mc:Fallback>
+      <p:transition advTm="30000">
+        <p:sndAc>
+          <p:stSnd>
+            <p:snd r:embed="rId2" name="click.wav"/>
           </p:stSnd>
         </p:sndAc>
       </p:transition>
@@ -4136,8 +6102,8 @@
   <p:clrMapOvr>
     <a:masterClrMapping/>
   </p:clrMapOvr>
-  <mc:AlternateContent xmlns:mc="http://schemas.openxmlformats.org/markup-compatibility/2006">
-    <mc:Choice xmlns:p14="http://schemas.microsoft.com/office/powerpoint/2010/main" Requires="p14">
+  <mc:AlternateContent xmlns:mc="http://schemas.openxmlformats.org/markup-compatibility/2006" xmlns:p14="http://schemas.microsoft.com/office/powerpoint/2010/main">
+    <mc:Choice Requires="p14">
       <p:transition p14:dur="10" advTm="30000">
         <p:sndAc>
           <p:stSnd>
@@ -4146,11 +6112,11 @@
         </p:sndAc>
       </p:transition>
     </mc:Choice>
-    <mc:Fallback>
+    <mc:Fallback xmlns="">
       <p:transition advTm="30000">
         <p:sndAc>
           <p:stSnd>
-            <p:snd r:embed="rId2" name="click.wav"/>
+            <p:snd r:embed="rId4" name="click.wav"/>
           </p:stSnd>
         </p:sndAc>
       </p:transition>
@@ -4266,8 +6232,8 @@
   <p:clrMapOvr>
     <a:masterClrMapping/>
   </p:clrMapOvr>
-  <mc:AlternateContent xmlns:mc="http://schemas.openxmlformats.org/markup-compatibility/2006">
-    <mc:Choice xmlns:p14="http://schemas.microsoft.com/office/powerpoint/2010/main" Requires="p14">
+  <mc:AlternateContent xmlns:mc="http://schemas.openxmlformats.org/markup-compatibility/2006" xmlns:p14="http://schemas.microsoft.com/office/powerpoint/2010/main">
+    <mc:Choice Requires="p14">
       <p:transition p14:dur="10" advTm="30000">
         <p:sndAc>
           <p:stSnd>
@@ -4276,11 +6242,11 @@
         </p:sndAc>
       </p:transition>
     </mc:Choice>
-    <mc:Fallback>
+    <mc:Fallback xmlns="">
       <p:transition advTm="30000">
         <p:sndAc>
           <p:stSnd>
-            <p:snd r:embed="rId2" name="click.wav"/>
+            <p:snd r:embed="rId4" name="click.wav"/>
           </p:stSnd>
         </p:sndAc>
       </p:transition>
@@ -4396,8 +6362,8 @@
   <p:clrMapOvr>
     <a:masterClrMapping/>
   </p:clrMapOvr>
-  <mc:AlternateContent xmlns:mc="http://schemas.openxmlformats.org/markup-compatibility/2006">
-    <mc:Choice xmlns:p14="http://schemas.microsoft.com/office/powerpoint/2010/main" Requires="p14">
+  <mc:AlternateContent xmlns:mc="http://schemas.openxmlformats.org/markup-compatibility/2006" xmlns:p14="http://schemas.microsoft.com/office/powerpoint/2010/main">
+    <mc:Choice Requires="p14">
       <p:transition p14:dur="10" advTm="30000">
         <p:sndAc>
           <p:stSnd>
@@ -4406,11 +6372,11 @@
         </p:sndAc>
       </p:transition>
     </mc:Choice>
-    <mc:Fallback>
+    <mc:Fallback xmlns="">
       <p:transition advTm="30000">
         <p:sndAc>
           <p:stSnd>
-            <p:snd r:embed="rId2" name="click.wav"/>
+            <p:snd r:embed="rId4" name="click.wav"/>
           </p:stSnd>
         </p:sndAc>
       </p:transition>
@@ -4526,8 +6492,8 @@
   <p:clrMapOvr>
     <a:masterClrMapping/>
   </p:clrMapOvr>
-  <mc:AlternateContent xmlns:mc="http://schemas.openxmlformats.org/markup-compatibility/2006">
-    <mc:Choice xmlns:p14="http://schemas.microsoft.com/office/powerpoint/2010/main" Requires="p14">
+  <mc:AlternateContent xmlns:mc="http://schemas.openxmlformats.org/markup-compatibility/2006" xmlns:p14="http://schemas.microsoft.com/office/powerpoint/2010/main">
+    <mc:Choice Requires="p14">
       <p:transition p14:dur="10" advTm="30000">
         <p:sndAc>
           <p:stSnd>
@@ -4536,11 +6502,11 @@
         </p:sndAc>
       </p:transition>
     </mc:Choice>
-    <mc:Fallback>
+    <mc:Fallback xmlns="">
       <p:transition advTm="30000">
         <p:sndAc>
           <p:stSnd>
-            <p:snd r:embed="rId2" name="click.wav"/>
+            <p:snd r:embed="rId4" name="click.wav"/>
           </p:stSnd>
         </p:sndAc>
       </p:transition>
@@ -4616,10 +6582,170 @@
           </a:p>
         </p:txBody>
       </p:sp>
+      <p:pic>
+        <p:nvPicPr>
+          <p:cNvPr id="4" name="Picture 3">
+            <a:extLst>
+              <a:ext uri="{FF2B5EF4-FFF2-40B4-BE49-F238E27FC236}">
+                <a16:creationId xmlns:a16="http://schemas.microsoft.com/office/drawing/2014/main" id="{B6566665-059C-422D-99FE-B9214AAEF743}"/>
+              </a:ext>
+            </a:extLst>
+          </p:cNvPr>
+          <p:cNvPicPr>
+            <a:picLocks noChangeAspect="1"/>
+          </p:cNvPicPr>
+          <p:nvPr/>
+        </p:nvPicPr>
+        <p:blipFill>
+          <a:blip r:embed="rId3"/>
+          <a:stretch>
+            <a:fillRect/>
+          </a:stretch>
+        </p:blipFill>
+        <p:spPr>
+          <a:xfrm>
+            <a:off x="30678" y="0"/>
+            <a:ext cx="12130644" cy="6858000"/>
+          </a:xfrm>
+          <a:prstGeom prst="rect">
+            <a:avLst/>
+          </a:prstGeom>
+        </p:spPr>
+      </p:pic>
     </p:spTree>
     <p:extLst>
       <p:ext uri="{BB962C8B-B14F-4D97-AF65-F5344CB8AC3E}">
         <p14:creationId xmlns:p14="http://schemas.microsoft.com/office/powerpoint/2010/main" val="1439649624"/>
+      </p:ext>
+    </p:extLst>
+  </p:cSld>
+  <p:clrMapOvr>
+    <a:masterClrMapping/>
+  </p:clrMapOvr>
+  <mc:AlternateContent xmlns:mc="http://schemas.openxmlformats.org/markup-compatibility/2006" xmlns:p14="http://schemas.microsoft.com/office/powerpoint/2010/main">
+    <mc:Choice Requires="p14">
+      <p:transition p14:dur="10" advTm="30000">
+        <p:sndAc>
+          <p:stSnd>
+            <p:snd r:embed="rId2" name="click.wav"/>
+          </p:stSnd>
+        </p:sndAc>
+      </p:transition>
+    </mc:Choice>
+    <mc:Fallback xmlns="">
+      <p:transition advTm="30000">
+        <p:sndAc>
+          <p:stSnd>
+            <p:snd r:embed="rId4" name="click.wav"/>
+          </p:stSnd>
+        </p:sndAc>
+      </p:transition>
+    </mc:Fallback>
+  </mc:AlternateContent>
+</p:sld>
+</file>
+
+<file path=ppt/slides/slide9.xml><?xml version="1.0" encoding="utf-8"?>
+<p:sld xmlns:a="http://schemas.openxmlformats.org/drawingml/2006/main" xmlns:r="http://schemas.openxmlformats.org/officeDocument/2006/relationships" xmlns:p="http://schemas.openxmlformats.org/presentationml/2006/main">
+  <p:cSld>
+    <p:spTree>
+      <p:nvGrpSpPr>
+        <p:cNvPr id="1" name=""/>
+        <p:cNvGrpSpPr/>
+        <p:nvPr/>
+      </p:nvGrpSpPr>
+      <p:grpSpPr>
+        <a:xfrm>
+          <a:off x="0" y="0"/>
+          <a:ext cx="0" cy="0"/>
+          <a:chOff x="0" y="0"/>
+          <a:chExt cx="0" cy="0"/>
+        </a:xfrm>
+      </p:grpSpPr>
+      <p:sp>
+        <p:nvSpPr>
+          <p:cNvPr id="2" name="Title 1">
+            <a:extLst>
+              <a:ext uri="{FF2B5EF4-FFF2-40B4-BE49-F238E27FC236}">
+                <a16:creationId xmlns:a16="http://schemas.microsoft.com/office/drawing/2014/main" id="{3105A310-F6C9-42C5-8659-4F56739BAEC2}"/>
+              </a:ext>
+            </a:extLst>
+          </p:cNvPr>
+          <p:cNvSpPr>
+            <a:spLocks noGrp="1"/>
+          </p:cNvSpPr>
+          <p:nvPr>
+            <p:ph type="title"/>
+          </p:nvPr>
+        </p:nvSpPr>
+        <p:spPr/>
+        <p:txBody>
+          <a:bodyPr/>
+          <a:lstStyle/>
+          <a:p>
+            <a:endParaRPr lang="en-US"/>
+          </a:p>
+        </p:txBody>
+      </p:sp>
+      <p:sp>
+        <p:nvSpPr>
+          <p:cNvPr id="3" name="Content Placeholder 2">
+            <a:extLst>
+              <a:ext uri="{FF2B5EF4-FFF2-40B4-BE49-F238E27FC236}">
+                <a16:creationId xmlns:a16="http://schemas.microsoft.com/office/drawing/2014/main" id="{85071AE1-689D-47F9-8C68-7357761CD9C3}"/>
+              </a:ext>
+            </a:extLst>
+          </p:cNvPr>
+          <p:cNvSpPr>
+            <a:spLocks noGrp="1"/>
+          </p:cNvSpPr>
+          <p:nvPr>
+            <p:ph idx="1"/>
+          </p:nvPr>
+        </p:nvSpPr>
+        <p:spPr/>
+        <p:txBody>
+          <a:bodyPr/>
+          <a:lstStyle/>
+          <a:p>
+            <a:endParaRPr lang="en-US"/>
+          </a:p>
+        </p:txBody>
+      </p:sp>
+      <p:pic>
+        <p:nvPicPr>
+          <p:cNvPr id="5" name="Picture 4">
+            <a:extLst>
+              <a:ext uri="{FF2B5EF4-FFF2-40B4-BE49-F238E27FC236}">
+                <a16:creationId xmlns:a16="http://schemas.microsoft.com/office/drawing/2014/main" id="{E39B1722-6646-47C6-888E-7AA45EA0DB04}"/>
+              </a:ext>
+            </a:extLst>
+          </p:cNvPr>
+          <p:cNvPicPr>
+            <a:picLocks noChangeAspect="1"/>
+          </p:cNvPicPr>
+          <p:nvPr/>
+        </p:nvPicPr>
+        <p:blipFill>
+          <a:blip r:embed="rId3"/>
+          <a:stretch>
+            <a:fillRect/>
+          </a:stretch>
+        </p:blipFill>
+        <p:spPr>
+          <a:xfrm>
+            <a:off x="0" y="2419818"/>
+            <a:ext cx="12192000" cy="2018363"/>
+          </a:xfrm>
+          <a:prstGeom prst="rect">
+            <a:avLst/>
+          </a:prstGeom>
+        </p:spPr>
+      </p:pic>
+    </p:spTree>
+    <p:extLst>
+      <p:ext uri="{BB962C8B-B14F-4D97-AF65-F5344CB8AC3E}">
+        <p14:creationId xmlns:p14="http://schemas.microsoft.com/office/powerpoint/2010/main" val="761427931"/>
       </p:ext>
     </p:extLst>
   </p:cSld>

--- a/ppt/1. selasa/2. bahasa inggris.pptx
+++ b/ppt/1. selasa/2. bahasa inggris.pptx
@@ -5,7 +5,7 @@
     <p:sldMasterId id="2147483648" r:id="rId1"/>
   </p:sldMasterIdLst>
   <p:notesMasterIdLst>
-    <p:notesMasterId r:id="rId26"/>
+    <p:notesMasterId r:id="rId44"/>
   </p:notesMasterIdLst>
   <p:sldIdLst>
     <p:sldId id="256" r:id="rId2"/>
@@ -32,6 +32,24 @@
     <p:sldId id="277" r:id="rId23"/>
     <p:sldId id="278" r:id="rId24"/>
     <p:sldId id="279" r:id="rId25"/>
+    <p:sldId id="280" r:id="rId26"/>
+    <p:sldId id="281" r:id="rId27"/>
+    <p:sldId id="282" r:id="rId28"/>
+    <p:sldId id="283" r:id="rId29"/>
+    <p:sldId id="284" r:id="rId30"/>
+    <p:sldId id="285" r:id="rId31"/>
+    <p:sldId id="286" r:id="rId32"/>
+    <p:sldId id="287" r:id="rId33"/>
+    <p:sldId id="288" r:id="rId34"/>
+    <p:sldId id="289" r:id="rId35"/>
+    <p:sldId id="290" r:id="rId36"/>
+    <p:sldId id="291" r:id="rId37"/>
+    <p:sldId id="292" r:id="rId38"/>
+    <p:sldId id="293" r:id="rId39"/>
+    <p:sldId id="294" r:id="rId40"/>
+    <p:sldId id="295" r:id="rId41"/>
+    <p:sldId id="296" r:id="rId42"/>
+    <p:sldId id="297" r:id="rId43"/>
   </p:sldIdLst>
   <p:sldSz cx="12192000" cy="6858000"/>
   <p:notesSz cx="6858000" cy="9144000"/>
@@ -3892,8 +3910,8 @@
   <p:clrMapOvr>
     <a:masterClrMapping/>
   </p:clrMapOvr>
-  <mc:AlternateContent xmlns:mc="http://schemas.openxmlformats.org/markup-compatibility/2006">
-    <mc:Choice xmlns:p14="http://schemas.microsoft.com/office/powerpoint/2010/main" Requires="p14">
+  <mc:AlternateContent xmlns:mc="http://schemas.openxmlformats.org/markup-compatibility/2006" xmlns:p14="http://schemas.microsoft.com/office/powerpoint/2010/main">
+    <mc:Choice Requires="p14">
       <p:transition p14:dur="10" advTm="30000">
         <p:sndAc>
           <p:stSnd>
@@ -3902,11 +3920,11 @@
         </p:sndAc>
       </p:transition>
     </mc:Choice>
-    <mc:Fallback>
+    <mc:Fallback xmlns="">
       <p:transition advTm="30000">
         <p:sndAc>
           <p:stSnd>
-            <p:snd r:embed="rId2" name="click.wav"/>
+            <p:snd r:embed="rId4" name="click.wav"/>
           </p:stSnd>
         </p:sndAc>
       </p:transition>
@@ -4022,8 +4040,8 @@
   <p:clrMapOvr>
     <a:masterClrMapping/>
   </p:clrMapOvr>
-  <mc:AlternateContent xmlns:mc="http://schemas.openxmlformats.org/markup-compatibility/2006">
-    <mc:Choice xmlns:p14="http://schemas.microsoft.com/office/powerpoint/2010/main" Requires="p14">
+  <mc:AlternateContent xmlns:mc="http://schemas.openxmlformats.org/markup-compatibility/2006" xmlns:p14="http://schemas.microsoft.com/office/powerpoint/2010/main">
+    <mc:Choice Requires="p14">
       <p:transition p14:dur="10" advTm="30000">
         <p:sndAc>
           <p:stSnd>
@@ -4032,11 +4050,11 @@
         </p:sndAc>
       </p:transition>
     </mc:Choice>
-    <mc:Fallback>
+    <mc:Fallback xmlns="">
       <p:transition advTm="30000">
         <p:sndAc>
           <p:stSnd>
-            <p:snd r:embed="rId2" name="click.wav"/>
+            <p:snd r:embed="rId4" name="click.wav"/>
           </p:stSnd>
         </p:sndAc>
       </p:transition>
@@ -4152,8 +4170,8 @@
   <p:clrMapOvr>
     <a:masterClrMapping/>
   </p:clrMapOvr>
-  <mc:AlternateContent xmlns:mc="http://schemas.openxmlformats.org/markup-compatibility/2006">
-    <mc:Choice xmlns:p14="http://schemas.microsoft.com/office/powerpoint/2010/main" Requires="p14">
+  <mc:AlternateContent xmlns:mc="http://schemas.openxmlformats.org/markup-compatibility/2006" xmlns:p14="http://schemas.microsoft.com/office/powerpoint/2010/main">
+    <mc:Choice Requires="p14">
       <p:transition p14:dur="10" advTm="30000">
         <p:sndAc>
           <p:stSnd>
@@ -4162,11 +4180,11 @@
         </p:sndAc>
       </p:transition>
     </mc:Choice>
-    <mc:Fallback>
+    <mc:Fallback xmlns="">
       <p:transition advTm="30000">
         <p:sndAc>
           <p:stSnd>
-            <p:snd r:embed="rId2" name="click.wav"/>
+            <p:snd r:embed="rId4" name="click.wav"/>
           </p:stSnd>
         </p:sndAc>
       </p:transition>
@@ -4282,8 +4300,8 @@
   <p:clrMapOvr>
     <a:masterClrMapping/>
   </p:clrMapOvr>
-  <mc:AlternateContent xmlns:mc="http://schemas.openxmlformats.org/markup-compatibility/2006">
-    <mc:Choice xmlns:p14="http://schemas.microsoft.com/office/powerpoint/2010/main" Requires="p14">
+  <mc:AlternateContent xmlns:mc="http://schemas.openxmlformats.org/markup-compatibility/2006" xmlns:p14="http://schemas.microsoft.com/office/powerpoint/2010/main">
+    <mc:Choice Requires="p14">
       <p:transition p14:dur="10" advTm="30000">
         <p:sndAc>
           <p:stSnd>
@@ -4292,11 +4310,11 @@
         </p:sndAc>
       </p:transition>
     </mc:Choice>
-    <mc:Fallback>
+    <mc:Fallback xmlns="">
       <p:transition advTm="30000">
         <p:sndAc>
           <p:stSnd>
-            <p:snd r:embed="rId2" name="click.wav"/>
+            <p:snd r:embed="rId4" name="click.wav"/>
           </p:stSnd>
         </p:sndAc>
       </p:transition>
@@ -4412,8 +4430,8 @@
   <p:clrMapOvr>
     <a:masterClrMapping/>
   </p:clrMapOvr>
-  <mc:AlternateContent xmlns:mc="http://schemas.openxmlformats.org/markup-compatibility/2006">
-    <mc:Choice xmlns:p14="http://schemas.microsoft.com/office/powerpoint/2010/main" Requires="p14">
+  <mc:AlternateContent xmlns:mc="http://schemas.openxmlformats.org/markup-compatibility/2006" xmlns:p14="http://schemas.microsoft.com/office/powerpoint/2010/main">
+    <mc:Choice Requires="p14">
       <p:transition p14:dur="10" advTm="30000">
         <p:sndAc>
           <p:stSnd>
@@ -4422,11 +4440,11 @@
         </p:sndAc>
       </p:transition>
     </mc:Choice>
-    <mc:Fallback>
+    <mc:Fallback xmlns="">
       <p:transition advTm="30000">
         <p:sndAc>
           <p:stSnd>
-            <p:snd r:embed="rId2" name="click.wav"/>
+            <p:snd r:embed="rId4" name="click.wav"/>
           </p:stSnd>
         </p:sndAc>
       </p:transition>
@@ -4542,8 +4560,8 @@
   <p:clrMapOvr>
     <a:masterClrMapping/>
   </p:clrMapOvr>
-  <mc:AlternateContent xmlns:mc="http://schemas.openxmlformats.org/markup-compatibility/2006">
-    <mc:Choice xmlns:p14="http://schemas.microsoft.com/office/powerpoint/2010/main" Requires="p14">
+  <mc:AlternateContent xmlns:mc="http://schemas.openxmlformats.org/markup-compatibility/2006" xmlns:p14="http://schemas.microsoft.com/office/powerpoint/2010/main">
+    <mc:Choice Requires="p14">
       <p:transition p14:dur="10" advTm="30000">
         <p:sndAc>
           <p:stSnd>
@@ -4552,11 +4570,11 @@
         </p:sndAc>
       </p:transition>
     </mc:Choice>
-    <mc:Fallback>
+    <mc:Fallback xmlns="">
       <p:transition advTm="30000">
         <p:sndAc>
           <p:stSnd>
-            <p:snd r:embed="rId2" name="click.wav"/>
+            <p:snd r:embed="rId4" name="click.wav"/>
           </p:stSnd>
         </p:sndAc>
       </p:transition>
@@ -4672,8 +4690,8 @@
   <p:clrMapOvr>
     <a:masterClrMapping/>
   </p:clrMapOvr>
-  <mc:AlternateContent xmlns:mc="http://schemas.openxmlformats.org/markup-compatibility/2006">
-    <mc:Choice xmlns:p14="http://schemas.microsoft.com/office/powerpoint/2010/main" Requires="p14">
+  <mc:AlternateContent xmlns:mc="http://schemas.openxmlformats.org/markup-compatibility/2006" xmlns:p14="http://schemas.microsoft.com/office/powerpoint/2010/main">
+    <mc:Choice Requires="p14">
       <p:transition p14:dur="10" advTm="30000">
         <p:sndAc>
           <p:stSnd>
@@ -4682,11 +4700,11 @@
         </p:sndAc>
       </p:transition>
     </mc:Choice>
-    <mc:Fallback>
+    <mc:Fallback xmlns="">
       <p:transition advTm="30000">
         <p:sndAc>
           <p:stSnd>
-            <p:snd r:embed="rId2" name="click.wav"/>
+            <p:snd r:embed="rId4" name="click.wav"/>
           </p:stSnd>
         </p:sndAc>
       </p:transition>
@@ -4802,8 +4820,8 @@
   <p:clrMapOvr>
     <a:masterClrMapping/>
   </p:clrMapOvr>
-  <mc:AlternateContent xmlns:mc="http://schemas.openxmlformats.org/markup-compatibility/2006">
-    <mc:Choice xmlns:p14="http://schemas.microsoft.com/office/powerpoint/2010/main" Requires="p14">
+  <mc:AlternateContent xmlns:mc="http://schemas.openxmlformats.org/markup-compatibility/2006" xmlns:p14="http://schemas.microsoft.com/office/powerpoint/2010/main">
+    <mc:Choice Requires="p14">
       <p:transition p14:dur="10" advTm="30000">
         <p:sndAc>
           <p:stSnd>
@@ -4812,11 +4830,11 @@
         </p:sndAc>
       </p:transition>
     </mc:Choice>
-    <mc:Fallback>
+    <mc:Fallback xmlns="">
       <p:transition advTm="30000">
         <p:sndAc>
           <p:stSnd>
-            <p:snd r:embed="rId2" name="click.wav"/>
+            <p:snd r:embed="rId4" name="click.wav"/>
           </p:stSnd>
         </p:sndAc>
       </p:transition>
@@ -4932,8 +4950,8 @@
   <p:clrMapOvr>
     <a:masterClrMapping/>
   </p:clrMapOvr>
-  <mc:AlternateContent xmlns:mc="http://schemas.openxmlformats.org/markup-compatibility/2006">
-    <mc:Choice xmlns:p14="http://schemas.microsoft.com/office/powerpoint/2010/main" Requires="p14">
+  <mc:AlternateContent xmlns:mc="http://schemas.openxmlformats.org/markup-compatibility/2006" xmlns:p14="http://schemas.microsoft.com/office/powerpoint/2010/main">
+    <mc:Choice Requires="p14">
       <p:transition p14:dur="10" advTm="30000">
         <p:sndAc>
           <p:stSnd>
@@ -4942,11 +4960,11 @@
         </p:sndAc>
       </p:transition>
     </mc:Choice>
-    <mc:Fallback>
+    <mc:Fallback xmlns="">
       <p:transition advTm="30000">
         <p:sndAc>
           <p:stSnd>
-            <p:snd r:embed="rId2" name="click.wav"/>
+            <p:snd r:embed="rId4" name="click.wav"/>
           </p:stSnd>
         </p:sndAc>
       </p:transition>
@@ -5062,8 +5080,8 @@
   <p:clrMapOvr>
     <a:masterClrMapping/>
   </p:clrMapOvr>
-  <mc:AlternateContent xmlns:mc="http://schemas.openxmlformats.org/markup-compatibility/2006">
-    <mc:Choice xmlns:p14="http://schemas.microsoft.com/office/powerpoint/2010/main" Requires="p14">
+  <mc:AlternateContent xmlns:mc="http://schemas.openxmlformats.org/markup-compatibility/2006" xmlns:p14="http://schemas.microsoft.com/office/powerpoint/2010/main">
+    <mc:Choice Requires="p14">
       <p:transition p14:dur="10" advTm="30000">
         <p:sndAc>
           <p:stSnd>
@@ -5072,11 +5090,11 @@
         </p:sndAc>
       </p:transition>
     </mc:Choice>
-    <mc:Fallback>
+    <mc:Fallback xmlns="">
       <p:transition advTm="30000">
         <p:sndAc>
           <p:stSnd>
-            <p:snd r:embed="rId2" name="click.wav"/>
+            <p:snd r:embed="rId4" name="click.wav"/>
           </p:stSnd>
         </p:sndAc>
       </p:transition>
@@ -5322,8 +5340,8 @@
   <p:clrMapOvr>
     <a:masterClrMapping/>
   </p:clrMapOvr>
-  <mc:AlternateContent xmlns:mc="http://schemas.openxmlformats.org/markup-compatibility/2006">
-    <mc:Choice xmlns:p14="http://schemas.microsoft.com/office/powerpoint/2010/main" Requires="p14">
+  <mc:AlternateContent xmlns:mc="http://schemas.openxmlformats.org/markup-compatibility/2006" xmlns:p14="http://schemas.microsoft.com/office/powerpoint/2010/main">
+    <mc:Choice Requires="p14">
       <p:transition p14:dur="10" advTm="30000">
         <p:sndAc>
           <p:stSnd>
@@ -5332,11 +5350,11 @@
         </p:sndAc>
       </p:transition>
     </mc:Choice>
-    <mc:Fallback>
+    <mc:Fallback xmlns="">
       <p:transition advTm="30000">
         <p:sndAc>
           <p:stSnd>
-            <p:snd r:embed="rId2" name="click.wav"/>
+            <p:snd r:embed="rId4" name="click.wav"/>
           </p:stSnd>
         </p:sndAc>
       </p:transition>
@@ -5452,8 +5470,8 @@
   <p:clrMapOvr>
     <a:masterClrMapping/>
   </p:clrMapOvr>
-  <mc:AlternateContent xmlns:mc="http://schemas.openxmlformats.org/markup-compatibility/2006">
-    <mc:Choice xmlns:p14="http://schemas.microsoft.com/office/powerpoint/2010/main" Requires="p14">
+  <mc:AlternateContent xmlns:mc="http://schemas.openxmlformats.org/markup-compatibility/2006" xmlns:p14="http://schemas.microsoft.com/office/powerpoint/2010/main">
+    <mc:Choice Requires="p14">
       <p:transition p14:dur="10" advTm="30000">
         <p:sndAc>
           <p:stSnd>
@@ -5462,11 +5480,11 @@
         </p:sndAc>
       </p:transition>
     </mc:Choice>
-    <mc:Fallback>
+    <mc:Fallback xmlns="">
       <p:transition advTm="30000">
         <p:sndAc>
           <p:stSnd>
-            <p:snd r:embed="rId2" name="click.wav"/>
+            <p:snd r:embed="rId4" name="click.wav"/>
           </p:stSnd>
         </p:sndAc>
       </p:transition>
@@ -5582,8 +5600,8 @@
   <p:clrMapOvr>
     <a:masterClrMapping/>
   </p:clrMapOvr>
-  <mc:AlternateContent xmlns:mc="http://schemas.openxmlformats.org/markup-compatibility/2006">
-    <mc:Choice xmlns:p14="http://schemas.microsoft.com/office/powerpoint/2010/main" Requires="p14">
+  <mc:AlternateContent xmlns:mc="http://schemas.openxmlformats.org/markup-compatibility/2006" xmlns:p14="http://schemas.microsoft.com/office/powerpoint/2010/main">
+    <mc:Choice Requires="p14">
       <p:transition p14:dur="10" advTm="30000">
         <p:sndAc>
           <p:stSnd>
@@ -5592,11 +5610,11 @@
         </p:sndAc>
       </p:transition>
     </mc:Choice>
-    <mc:Fallback>
+    <mc:Fallback xmlns="">
       <p:transition advTm="30000">
         <p:sndAc>
           <p:stSnd>
-            <p:snd r:embed="rId2" name="click.wav"/>
+            <p:snd r:embed="rId4" name="click.wav"/>
           </p:stSnd>
         </p:sndAc>
       </p:transition>
@@ -5712,8 +5730,8 @@
   <p:clrMapOvr>
     <a:masterClrMapping/>
   </p:clrMapOvr>
-  <mc:AlternateContent xmlns:mc="http://schemas.openxmlformats.org/markup-compatibility/2006">
-    <mc:Choice xmlns:p14="http://schemas.microsoft.com/office/powerpoint/2010/main" Requires="p14">
+  <mc:AlternateContent xmlns:mc="http://schemas.openxmlformats.org/markup-compatibility/2006" xmlns:p14="http://schemas.microsoft.com/office/powerpoint/2010/main">
+    <mc:Choice Requires="p14">
       <p:transition p14:dur="10" advTm="30000">
         <p:sndAc>
           <p:stSnd>
@@ -5722,11 +5740,11 @@
         </p:sndAc>
       </p:transition>
     </mc:Choice>
-    <mc:Fallback>
+    <mc:Fallback xmlns="">
       <p:transition advTm="30000">
         <p:sndAc>
           <p:stSnd>
-            <p:snd r:embed="rId2" name="click.wav"/>
+            <p:snd r:embed="rId4" name="click.wav"/>
           </p:stSnd>
         </p:sndAc>
       </p:transition>
@@ -5836,6 +5854,601 @@
     <p:extLst>
       <p:ext uri="{BB962C8B-B14F-4D97-AF65-F5344CB8AC3E}">
         <p14:creationId xmlns:p14="http://schemas.microsoft.com/office/powerpoint/2010/main" val="1564434029"/>
+      </p:ext>
+    </p:extLst>
+  </p:cSld>
+  <p:clrMapOvr>
+    <a:masterClrMapping/>
+  </p:clrMapOvr>
+  <mc:AlternateContent xmlns:mc="http://schemas.openxmlformats.org/markup-compatibility/2006" xmlns:p14="http://schemas.microsoft.com/office/powerpoint/2010/main">
+    <mc:Choice Requires="p14">
+      <p:transition p14:dur="10" advTm="30000">
+        <p:sndAc>
+          <p:stSnd>
+            <p:snd r:embed="rId2" name="click.wav"/>
+          </p:stSnd>
+        </p:sndAc>
+      </p:transition>
+    </mc:Choice>
+    <mc:Fallback xmlns="">
+      <p:transition advTm="30000">
+        <p:sndAc>
+          <p:stSnd>
+            <p:snd r:embed="rId4" name="click.wav"/>
+          </p:stSnd>
+        </p:sndAc>
+      </p:transition>
+    </mc:Fallback>
+  </mc:AlternateContent>
+</p:sld>
+</file>
+
+<file path=ppt/slides/slide25.xml><?xml version="1.0" encoding="utf-8"?>
+<p:sld xmlns:a="http://schemas.openxmlformats.org/drawingml/2006/main" xmlns:r="http://schemas.openxmlformats.org/officeDocument/2006/relationships" xmlns:p="http://schemas.openxmlformats.org/presentationml/2006/main">
+  <p:cSld>
+    <p:spTree>
+      <p:nvGrpSpPr>
+        <p:cNvPr id="1" name="">
+          <a:extLst>
+            <a:ext uri="{FF2B5EF4-FFF2-40B4-BE49-F238E27FC236}">
+              <a16:creationId xmlns:a16="http://schemas.microsoft.com/office/drawing/2014/main" id="{9987C333-A452-D2CD-0348-AB03B405D3E9}"/>
+            </a:ext>
+          </a:extLst>
+        </p:cNvPr>
+        <p:cNvGrpSpPr/>
+        <p:nvPr/>
+      </p:nvGrpSpPr>
+      <p:grpSpPr>
+        <a:xfrm>
+          <a:off x="0" y="0"/>
+          <a:ext cx="0" cy="0"/>
+          <a:chOff x="0" y="0"/>
+          <a:chExt cx="0" cy="0"/>
+        </a:xfrm>
+      </p:grpSpPr>
+      <p:sp>
+        <p:nvSpPr>
+          <p:cNvPr id="2" name="Title 1">
+            <a:extLst>
+              <a:ext uri="{FF2B5EF4-FFF2-40B4-BE49-F238E27FC236}">
+                <a16:creationId xmlns:a16="http://schemas.microsoft.com/office/drawing/2014/main" id="{4F069F59-A867-4E7C-5F42-4D35D0F1D080}"/>
+              </a:ext>
+            </a:extLst>
+          </p:cNvPr>
+          <p:cNvSpPr>
+            <a:spLocks noGrp="1"/>
+          </p:cNvSpPr>
+          <p:nvPr>
+            <p:ph type="title"/>
+          </p:nvPr>
+        </p:nvSpPr>
+        <p:spPr/>
+        <p:txBody>
+          <a:bodyPr/>
+          <a:lstStyle/>
+          <a:p>
+            <a:endParaRPr lang="en-US"/>
+          </a:p>
+        </p:txBody>
+      </p:sp>
+      <p:pic>
+        <p:nvPicPr>
+          <p:cNvPr id="6" name="Content Placeholder 5">
+            <a:extLst>
+              <a:ext uri="{FF2B5EF4-FFF2-40B4-BE49-F238E27FC236}">
+                <a16:creationId xmlns:a16="http://schemas.microsoft.com/office/drawing/2014/main" id="{5124E951-6124-4ACF-C780-ECD7E9F21CD7}"/>
+              </a:ext>
+            </a:extLst>
+          </p:cNvPr>
+          <p:cNvPicPr>
+            <a:picLocks noGrp="1" noChangeAspect="1"/>
+          </p:cNvPicPr>
+          <p:nvPr>
+            <p:ph idx="1"/>
+          </p:nvPr>
+        </p:nvPicPr>
+        <p:blipFill>
+          <a:blip r:embed="rId3">
+            <a:extLst>
+              <a:ext uri="{28A0092B-C50C-407E-A947-70E740481C1C}">
+                <a14:useLocalDpi xmlns:a14="http://schemas.microsoft.com/office/drawing/2010/main" val="0"/>
+              </a:ext>
+            </a:extLst>
+          </a:blip>
+          <a:stretch>
+            <a:fillRect/>
+          </a:stretch>
+        </p:blipFill>
+        <p:spPr>
+          <a:xfrm>
+            <a:off x="838200" y="2349192"/>
+            <a:ext cx="10515600" cy="2159616"/>
+          </a:xfrm>
+          <a:prstGeom prst="rect">
+            <a:avLst/>
+          </a:prstGeom>
+        </p:spPr>
+      </p:pic>
+    </p:spTree>
+    <p:extLst>
+      <p:ext uri="{BB962C8B-B14F-4D97-AF65-F5344CB8AC3E}">
+        <p14:creationId xmlns:p14="http://schemas.microsoft.com/office/powerpoint/2010/main" val="1919528791"/>
+      </p:ext>
+    </p:extLst>
+  </p:cSld>
+  <p:clrMapOvr>
+    <a:masterClrMapping/>
+  </p:clrMapOvr>
+  <mc:AlternateContent xmlns:mc="http://schemas.openxmlformats.org/markup-compatibility/2006">
+    <mc:Choice xmlns:p14="http://schemas.microsoft.com/office/powerpoint/2010/main" Requires="p14">
+      <p:transition p14:dur="10" advTm="30000">
+        <p:sndAc>
+          <p:stSnd>
+            <p:snd r:embed="rId2" name="click.wav"/>
+          </p:stSnd>
+        </p:sndAc>
+      </p:transition>
+    </mc:Choice>
+    <mc:Fallback>
+      <p:transition advTm="30000">
+        <p:sndAc>
+          <p:stSnd>
+            <p:snd r:embed="rId2" name="click.wav"/>
+          </p:stSnd>
+        </p:sndAc>
+      </p:transition>
+    </mc:Fallback>
+  </mc:AlternateContent>
+</p:sld>
+</file>
+
+<file path=ppt/slides/slide26.xml><?xml version="1.0" encoding="utf-8"?>
+<p:sld xmlns:a="http://schemas.openxmlformats.org/drawingml/2006/main" xmlns:r="http://schemas.openxmlformats.org/officeDocument/2006/relationships" xmlns:p="http://schemas.openxmlformats.org/presentationml/2006/main">
+  <p:cSld>
+    <p:spTree>
+      <p:nvGrpSpPr>
+        <p:cNvPr id="1" name="">
+          <a:extLst>
+            <a:ext uri="{FF2B5EF4-FFF2-40B4-BE49-F238E27FC236}">
+              <a16:creationId xmlns:a16="http://schemas.microsoft.com/office/drawing/2014/main" id="{278E4014-7BC1-45A2-B74C-75E660FD93CB}"/>
+            </a:ext>
+          </a:extLst>
+        </p:cNvPr>
+        <p:cNvGrpSpPr/>
+        <p:nvPr/>
+      </p:nvGrpSpPr>
+      <p:grpSpPr>
+        <a:xfrm>
+          <a:off x="0" y="0"/>
+          <a:ext cx="0" cy="0"/>
+          <a:chOff x="0" y="0"/>
+          <a:chExt cx="0" cy="0"/>
+        </a:xfrm>
+      </p:grpSpPr>
+      <p:sp>
+        <p:nvSpPr>
+          <p:cNvPr id="2" name="Title 1">
+            <a:extLst>
+              <a:ext uri="{FF2B5EF4-FFF2-40B4-BE49-F238E27FC236}">
+                <a16:creationId xmlns:a16="http://schemas.microsoft.com/office/drawing/2014/main" id="{45EBB16A-CA42-0FF5-F60A-158F520CFB0C}"/>
+              </a:ext>
+            </a:extLst>
+          </p:cNvPr>
+          <p:cNvSpPr>
+            <a:spLocks noGrp="1"/>
+          </p:cNvSpPr>
+          <p:nvPr>
+            <p:ph type="title"/>
+          </p:nvPr>
+        </p:nvSpPr>
+        <p:spPr/>
+        <p:txBody>
+          <a:bodyPr/>
+          <a:lstStyle/>
+          <a:p>
+            <a:endParaRPr lang="en-US"/>
+          </a:p>
+        </p:txBody>
+      </p:sp>
+      <p:pic>
+        <p:nvPicPr>
+          <p:cNvPr id="7" name="Content Placeholder 6">
+            <a:extLst>
+              <a:ext uri="{FF2B5EF4-FFF2-40B4-BE49-F238E27FC236}">
+                <a16:creationId xmlns:a16="http://schemas.microsoft.com/office/drawing/2014/main" id="{24E60EE0-1ECE-0B4E-8FA2-CD7467BD9164}"/>
+              </a:ext>
+            </a:extLst>
+          </p:cNvPr>
+          <p:cNvPicPr>
+            <a:picLocks noGrp="1" noChangeAspect="1"/>
+          </p:cNvPicPr>
+          <p:nvPr>
+            <p:ph idx="1"/>
+          </p:nvPr>
+        </p:nvPicPr>
+        <p:blipFill>
+          <a:blip r:embed="rId3">
+            <a:extLst>
+              <a:ext uri="{28A0092B-C50C-407E-A947-70E740481C1C}">
+                <a14:useLocalDpi xmlns:a14="http://schemas.microsoft.com/office/drawing/2010/main" val="0"/>
+              </a:ext>
+            </a:extLst>
+          </a:blip>
+          <a:stretch>
+            <a:fillRect/>
+          </a:stretch>
+        </p:blipFill>
+        <p:spPr>
+          <a:xfrm>
+            <a:off x="1266151" y="2528762"/>
+            <a:ext cx="9659698" cy="1800476"/>
+          </a:xfrm>
+          <a:prstGeom prst="rect">
+            <a:avLst/>
+          </a:prstGeom>
+        </p:spPr>
+      </p:pic>
+    </p:spTree>
+    <p:extLst>
+      <p:ext uri="{BB962C8B-B14F-4D97-AF65-F5344CB8AC3E}">
+        <p14:creationId xmlns:p14="http://schemas.microsoft.com/office/powerpoint/2010/main" val="1394861109"/>
+      </p:ext>
+    </p:extLst>
+  </p:cSld>
+  <p:clrMapOvr>
+    <a:masterClrMapping/>
+  </p:clrMapOvr>
+  <mc:AlternateContent xmlns:mc="http://schemas.openxmlformats.org/markup-compatibility/2006">
+    <mc:Choice xmlns:p14="http://schemas.microsoft.com/office/powerpoint/2010/main" Requires="p14">
+      <p:transition p14:dur="10" advTm="30000">
+        <p:sndAc>
+          <p:stSnd>
+            <p:snd r:embed="rId2" name="click.wav"/>
+          </p:stSnd>
+        </p:sndAc>
+      </p:transition>
+    </mc:Choice>
+    <mc:Fallback>
+      <p:transition advTm="30000">
+        <p:sndAc>
+          <p:stSnd>
+            <p:snd r:embed="rId2" name="click.wav"/>
+          </p:stSnd>
+        </p:sndAc>
+      </p:transition>
+    </mc:Fallback>
+  </mc:AlternateContent>
+</p:sld>
+</file>
+
+<file path=ppt/slides/slide27.xml><?xml version="1.0" encoding="utf-8"?>
+<p:sld xmlns:a="http://schemas.openxmlformats.org/drawingml/2006/main" xmlns:r="http://schemas.openxmlformats.org/officeDocument/2006/relationships" xmlns:p="http://schemas.openxmlformats.org/presentationml/2006/main">
+  <p:cSld>
+    <p:spTree>
+      <p:nvGrpSpPr>
+        <p:cNvPr id="1" name="">
+          <a:extLst>
+            <a:ext uri="{FF2B5EF4-FFF2-40B4-BE49-F238E27FC236}">
+              <a16:creationId xmlns:a16="http://schemas.microsoft.com/office/drawing/2014/main" id="{D134A8A7-FEAE-F4C3-7C66-4F092324D3FD}"/>
+            </a:ext>
+          </a:extLst>
+        </p:cNvPr>
+        <p:cNvGrpSpPr/>
+        <p:nvPr/>
+      </p:nvGrpSpPr>
+      <p:grpSpPr>
+        <a:xfrm>
+          <a:off x="0" y="0"/>
+          <a:ext cx="0" cy="0"/>
+          <a:chOff x="0" y="0"/>
+          <a:chExt cx="0" cy="0"/>
+        </a:xfrm>
+      </p:grpSpPr>
+      <p:sp>
+        <p:nvSpPr>
+          <p:cNvPr id="2" name="Title 1">
+            <a:extLst>
+              <a:ext uri="{FF2B5EF4-FFF2-40B4-BE49-F238E27FC236}">
+                <a16:creationId xmlns:a16="http://schemas.microsoft.com/office/drawing/2014/main" id="{A963A494-DF46-95C2-D2D1-3556250C0390}"/>
+              </a:ext>
+            </a:extLst>
+          </p:cNvPr>
+          <p:cNvSpPr>
+            <a:spLocks noGrp="1"/>
+          </p:cNvSpPr>
+          <p:nvPr>
+            <p:ph type="title"/>
+          </p:nvPr>
+        </p:nvSpPr>
+        <p:spPr/>
+        <p:txBody>
+          <a:bodyPr/>
+          <a:lstStyle/>
+          <a:p>
+            <a:endParaRPr lang="en-US"/>
+          </a:p>
+        </p:txBody>
+      </p:sp>
+      <p:pic>
+        <p:nvPicPr>
+          <p:cNvPr id="6" name="Content Placeholder 5">
+            <a:extLst>
+              <a:ext uri="{FF2B5EF4-FFF2-40B4-BE49-F238E27FC236}">
+                <a16:creationId xmlns:a16="http://schemas.microsoft.com/office/drawing/2014/main" id="{B7BA10F2-AF55-5CAA-171B-97225CDFE14B}"/>
+              </a:ext>
+            </a:extLst>
+          </p:cNvPr>
+          <p:cNvPicPr>
+            <a:picLocks noGrp="1" noChangeAspect="1"/>
+          </p:cNvPicPr>
+          <p:nvPr>
+            <p:ph idx="1"/>
+          </p:nvPr>
+        </p:nvPicPr>
+        <p:blipFill>
+          <a:blip r:embed="rId3">
+            <a:extLst>
+              <a:ext uri="{28A0092B-C50C-407E-A947-70E740481C1C}">
+                <a14:useLocalDpi xmlns:a14="http://schemas.microsoft.com/office/drawing/2010/main" val="0"/>
+              </a:ext>
+            </a:extLst>
+          </a:blip>
+          <a:stretch>
+            <a:fillRect/>
+          </a:stretch>
+        </p:blipFill>
+        <p:spPr>
+          <a:xfrm>
+            <a:off x="2075889" y="2262024"/>
+            <a:ext cx="8040222" cy="2333951"/>
+          </a:xfrm>
+          <a:prstGeom prst="rect">
+            <a:avLst/>
+          </a:prstGeom>
+        </p:spPr>
+      </p:pic>
+    </p:spTree>
+    <p:extLst>
+      <p:ext uri="{BB962C8B-B14F-4D97-AF65-F5344CB8AC3E}">
+        <p14:creationId xmlns:p14="http://schemas.microsoft.com/office/powerpoint/2010/main" val="1797180371"/>
+      </p:ext>
+    </p:extLst>
+  </p:cSld>
+  <p:clrMapOvr>
+    <a:masterClrMapping/>
+  </p:clrMapOvr>
+  <mc:AlternateContent xmlns:mc="http://schemas.openxmlformats.org/markup-compatibility/2006">
+    <mc:Choice xmlns:p14="http://schemas.microsoft.com/office/powerpoint/2010/main" Requires="p14">
+      <p:transition p14:dur="10" advTm="30000">
+        <p:sndAc>
+          <p:stSnd>
+            <p:snd r:embed="rId2" name="click.wav"/>
+          </p:stSnd>
+        </p:sndAc>
+      </p:transition>
+    </mc:Choice>
+    <mc:Fallback>
+      <p:transition advTm="30000">
+        <p:sndAc>
+          <p:stSnd>
+            <p:snd r:embed="rId2" name="click.wav"/>
+          </p:stSnd>
+        </p:sndAc>
+      </p:transition>
+    </mc:Fallback>
+  </mc:AlternateContent>
+</p:sld>
+</file>
+
+<file path=ppt/slides/slide28.xml><?xml version="1.0" encoding="utf-8"?>
+<p:sld xmlns:a="http://schemas.openxmlformats.org/drawingml/2006/main" xmlns:r="http://schemas.openxmlformats.org/officeDocument/2006/relationships" xmlns:p="http://schemas.openxmlformats.org/presentationml/2006/main">
+  <p:cSld>
+    <p:spTree>
+      <p:nvGrpSpPr>
+        <p:cNvPr id="1" name="">
+          <a:extLst>
+            <a:ext uri="{FF2B5EF4-FFF2-40B4-BE49-F238E27FC236}">
+              <a16:creationId xmlns:a16="http://schemas.microsoft.com/office/drawing/2014/main" id="{5EC0326B-290B-0899-E5A3-1BD70F3368F2}"/>
+            </a:ext>
+          </a:extLst>
+        </p:cNvPr>
+        <p:cNvGrpSpPr/>
+        <p:nvPr/>
+      </p:nvGrpSpPr>
+      <p:grpSpPr>
+        <a:xfrm>
+          <a:off x="0" y="0"/>
+          <a:ext cx="0" cy="0"/>
+          <a:chOff x="0" y="0"/>
+          <a:chExt cx="0" cy="0"/>
+        </a:xfrm>
+      </p:grpSpPr>
+      <p:sp>
+        <p:nvSpPr>
+          <p:cNvPr id="2" name="Title 1">
+            <a:extLst>
+              <a:ext uri="{FF2B5EF4-FFF2-40B4-BE49-F238E27FC236}">
+                <a16:creationId xmlns:a16="http://schemas.microsoft.com/office/drawing/2014/main" id="{DB60BCFD-EE06-7E54-02A3-DCD3378A0F15}"/>
+              </a:ext>
+            </a:extLst>
+          </p:cNvPr>
+          <p:cNvSpPr>
+            <a:spLocks noGrp="1"/>
+          </p:cNvSpPr>
+          <p:nvPr>
+            <p:ph type="title"/>
+          </p:nvPr>
+        </p:nvSpPr>
+        <p:spPr/>
+        <p:txBody>
+          <a:bodyPr/>
+          <a:lstStyle/>
+          <a:p>
+            <a:endParaRPr lang="en-US"/>
+          </a:p>
+        </p:txBody>
+      </p:sp>
+      <p:pic>
+        <p:nvPicPr>
+          <p:cNvPr id="7" name="Content Placeholder 6">
+            <a:extLst>
+              <a:ext uri="{FF2B5EF4-FFF2-40B4-BE49-F238E27FC236}">
+                <a16:creationId xmlns:a16="http://schemas.microsoft.com/office/drawing/2014/main" id="{577845C8-6995-3A34-DD22-6882634DFDDE}"/>
+              </a:ext>
+            </a:extLst>
+          </p:cNvPr>
+          <p:cNvPicPr>
+            <a:picLocks noGrp="1" noChangeAspect="1"/>
+          </p:cNvPicPr>
+          <p:nvPr>
+            <p:ph idx="1"/>
+          </p:nvPr>
+        </p:nvPicPr>
+        <p:blipFill>
+          <a:blip r:embed="rId3">
+            <a:extLst>
+              <a:ext uri="{28A0092B-C50C-407E-A947-70E740481C1C}">
+                <a14:useLocalDpi xmlns:a14="http://schemas.microsoft.com/office/drawing/2010/main" val="0"/>
+              </a:ext>
+            </a:extLst>
+          </a:blip>
+          <a:stretch>
+            <a:fillRect/>
+          </a:stretch>
+        </p:blipFill>
+        <p:spPr>
+          <a:xfrm>
+            <a:off x="2967973" y="1253331"/>
+            <a:ext cx="6256054" cy="4351338"/>
+          </a:xfrm>
+          <a:prstGeom prst="rect">
+            <a:avLst/>
+          </a:prstGeom>
+        </p:spPr>
+      </p:pic>
+    </p:spTree>
+    <p:extLst>
+      <p:ext uri="{BB962C8B-B14F-4D97-AF65-F5344CB8AC3E}">
+        <p14:creationId xmlns:p14="http://schemas.microsoft.com/office/powerpoint/2010/main" val="65872416"/>
+      </p:ext>
+    </p:extLst>
+  </p:cSld>
+  <p:clrMapOvr>
+    <a:masterClrMapping/>
+  </p:clrMapOvr>
+  <mc:AlternateContent xmlns:mc="http://schemas.openxmlformats.org/markup-compatibility/2006">
+    <mc:Choice xmlns:p14="http://schemas.microsoft.com/office/powerpoint/2010/main" Requires="p14">
+      <p:transition p14:dur="10" advTm="30000">
+        <p:sndAc>
+          <p:stSnd>
+            <p:snd r:embed="rId2" name="click.wav"/>
+          </p:stSnd>
+        </p:sndAc>
+      </p:transition>
+    </mc:Choice>
+    <mc:Fallback>
+      <p:transition advTm="30000">
+        <p:sndAc>
+          <p:stSnd>
+            <p:snd r:embed="rId2" name="click.wav"/>
+          </p:stSnd>
+        </p:sndAc>
+      </p:transition>
+    </mc:Fallback>
+  </mc:AlternateContent>
+</p:sld>
+</file>
+
+<file path=ppt/slides/slide29.xml><?xml version="1.0" encoding="utf-8"?>
+<p:sld xmlns:a="http://schemas.openxmlformats.org/drawingml/2006/main" xmlns:r="http://schemas.openxmlformats.org/officeDocument/2006/relationships" xmlns:p="http://schemas.openxmlformats.org/presentationml/2006/main">
+  <p:cSld>
+    <p:spTree>
+      <p:nvGrpSpPr>
+        <p:cNvPr id="1" name="">
+          <a:extLst>
+            <a:ext uri="{FF2B5EF4-FFF2-40B4-BE49-F238E27FC236}">
+              <a16:creationId xmlns:a16="http://schemas.microsoft.com/office/drawing/2014/main" id="{EFCE4357-C709-D15A-AD76-E593535939D3}"/>
+            </a:ext>
+          </a:extLst>
+        </p:cNvPr>
+        <p:cNvGrpSpPr/>
+        <p:nvPr/>
+      </p:nvGrpSpPr>
+      <p:grpSpPr>
+        <a:xfrm>
+          <a:off x="0" y="0"/>
+          <a:ext cx="0" cy="0"/>
+          <a:chOff x="0" y="0"/>
+          <a:chExt cx="0" cy="0"/>
+        </a:xfrm>
+      </p:grpSpPr>
+      <p:sp>
+        <p:nvSpPr>
+          <p:cNvPr id="2" name="Title 1">
+            <a:extLst>
+              <a:ext uri="{FF2B5EF4-FFF2-40B4-BE49-F238E27FC236}">
+                <a16:creationId xmlns:a16="http://schemas.microsoft.com/office/drawing/2014/main" id="{2628FF74-7BBA-7A4E-F872-E8D6BC2ED117}"/>
+              </a:ext>
+            </a:extLst>
+          </p:cNvPr>
+          <p:cNvSpPr>
+            <a:spLocks noGrp="1"/>
+          </p:cNvSpPr>
+          <p:nvPr>
+            <p:ph type="title"/>
+          </p:nvPr>
+        </p:nvSpPr>
+        <p:spPr/>
+        <p:txBody>
+          <a:bodyPr/>
+          <a:lstStyle/>
+          <a:p>
+            <a:endParaRPr lang="en-US"/>
+          </a:p>
+        </p:txBody>
+      </p:sp>
+      <p:pic>
+        <p:nvPicPr>
+          <p:cNvPr id="6" name="Content Placeholder 5">
+            <a:extLst>
+              <a:ext uri="{FF2B5EF4-FFF2-40B4-BE49-F238E27FC236}">
+                <a16:creationId xmlns:a16="http://schemas.microsoft.com/office/drawing/2014/main" id="{70A123EA-7497-342C-3384-E44C301E34AA}"/>
+              </a:ext>
+            </a:extLst>
+          </p:cNvPr>
+          <p:cNvPicPr>
+            <a:picLocks noGrp="1" noChangeAspect="1"/>
+          </p:cNvPicPr>
+          <p:nvPr>
+            <p:ph idx="1"/>
+          </p:nvPr>
+        </p:nvPicPr>
+        <p:blipFill>
+          <a:blip r:embed="rId3">
+            <a:extLst>
+              <a:ext uri="{28A0092B-C50C-407E-A947-70E740481C1C}">
+                <a14:useLocalDpi xmlns:a14="http://schemas.microsoft.com/office/drawing/2010/main" val="0"/>
+              </a:ext>
+            </a:extLst>
+          </a:blip>
+          <a:stretch>
+            <a:fillRect/>
+          </a:stretch>
+        </p:blipFill>
+        <p:spPr>
+          <a:xfrm>
+            <a:off x="1261388" y="2257261"/>
+            <a:ext cx="9669224" cy="2343477"/>
+          </a:xfrm>
+          <a:prstGeom prst="rect">
+            <a:avLst/>
+          </a:prstGeom>
+        </p:spPr>
+      </p:pic>
+    </p:spTree>
+    <p:extLst>
+      <p:ext uri="{BB962C8B-B14F-4D97-AF65-F5344CB8AC3E}">
+        <p14:creationId xmlns:p14="http://schemas.microsoft.com/office/powerpoint/2010/main" val="2185683455"/>
       </p:ext>
     </p:extLst>
   </p:cSld>
@@ -5995,6 +6608,1061 @@
 </p:sld>
 </file>
 
+<file path=ppt/slides/slide30.xml><?xml version="1.0" encoding="utf-8"?>
+<p:sld xmlns:a="http://schemas.openxmlformats.org/drawingml/2006/main" xmlns:r="http://schemas.openxmlformats.org/officeDocument/2006/relationships" xmlns:p="http://schemas.openxmlformats.org/presentationml/2006/main">
+  <p:cSld>
+    <p:spTree>
+      <p:nvGrpSpPr>
+        <p:cNvPr id="1" name="">
+          <a:extLst>
+            <a:ext uri="{FF2B5EF4-FFF2-40B4-BE49-F238E27FC236}">
+              <a16:creationId xmlns:a16="http://schemas.microsoft.com/office/drawing/2014/main" id="{278EA75A-016D-1F62-6572-084A9CE4F208}"/>
+            </a:ext>
+          </a:extLst>
+        </p:cNvPr>
+        <p:cNvGrpSpPr/>
+        <p:nvPr/>
+      </p:nvGrpSpPr>
+      <p:grpSpPr>
+        <a:xfrm>
+          <a:off x="0" y="0"/>
+          <a:ext cx="0" cy="0"/>
+          <a:chOff x="0" y="0"/>
+          <a:chExt cx="0" cy="0"/>
+        </a:xfrm>
+      </p:grpSpPr>
+      <p:sp>
+        <p:nvSpPr>
+          <p:cNvPr id="2" name="Title 1">
+            <a:extLst>
+              <a:ext uri="{FF2B5EF4-FFF2-40B4-BE49-F238E27FC236}">
+                <a16:creationId xmlns:a16="http://schemas.microsoft.com/office/drawing/2014/main" id="{19A053C8-8A79-F5A8-B1B9-592F772CBB17}"/>
+              </a:ext>
+            </a:extLst>
+          </p:cNvPr>
+          <p:cNvSpPr>
+            <a:spLocks noGrp="1"/>
+          </p:cNvSpPr>
+          <p:nvPr>
+            <p:ph type="title"/>
+          </p:nvPr>
+        </p:nvSpPr>
+        <p:spPr/>
+        <p:txBody>
+          <a:bodyPr/>
+          <a:lstStyle/>
+          <a:p>
+            <a:endParaRPr lang="en-US"/>
+          </a:p>
+        </p:txBody>
+      </p:sp>
+      <p:pic>
+        <p:nvPicPr>
+          <p:cNvPr id="7" name="Content Placeholder 6">
+            <a:extLst>
+              <a:ext uri="{FF2B5EF4-FFF2-40B4-BE49-F238E27FC236}">
+                <a16:creationId xmlns:a16="http://schemas.microsoft.com/office/drawing/2014/main" id="{17107622-BEB5-43D5-3A51-C3BAD90DEEB5}"/>
+              </a:ext>
+            </a:extLst>
+          </p:cNvPr>
+          <p:cNvPicPr>
+            <a:picLocks noGrp="1" noChangeAspect="1"/>
+          </p:cNvPicPr>
+          <p:nvPr>
+            <p:ph idx="1"/>
+          </p:nvPr>
+        </p:nvPicPr>
+        <p:blipFill>
+          <a:blip r:embed="rId3">
+            <a:extLst>
+              <a:ext uri="{28A0092B-C50C-407E-A947-70E740481C1C}">
+                <a14:useLocalDpi xmlns:a14="http://schemas.microsoft.com/office/drawing/2010/main" val="0"/>
+              </a:ext>
+            </a:extLst>
+          </a:blip>
+          <a:stretch>
+            <a:fillRect/>
+          </a:stretch>
+        </p:blipFill>
+        <p:spPr>
+          <a:xfrm>
+            <a:off x="1070861" y="2395393"/>
+            <a:ext cx="10050278" cy="2067213"/>
+          </a:xfrm>
+          <a:prstGeom prst="rect">
+            <a:avLst/>
+          </a:prstGeom>
+        </p:spPr>
+      </p:pic>
+    </p:spTree>
+    <p:extLst>
+      <p:ext uri="{BB962C8B-B14F-4D97-AF65-F5344CB8AC3E}">
+        <p14:creationId xmlns:p14="http://schemas.microsoft.com/office/powerpoint/2010/main" val="468979030"/>
+      </p:ext>
+    </p:extLst>
+  </p:cSld>
+  <p:clrMapOvr>
+    <a:masterClrMapping/>
+  </p:clrMapOvr>
+  <mc:AlternateContent xmlns:mc="http://schemas.openxmlformats.org/markup-compatibility/2006">
+    <mc:Choice xmlns:p14="http://schemas.microsoft.com/office/powerpoint/2010/main" Requires="p14">
+      <p:transition p14:dur="10" advTm="30000">
+        <p:sndAc>
+          <p:stSnd>
+            <p:snd r:embed="rId2" name="click.wav"/>
+          </p:stSnd>
+        </p:sndAc>
+      </p:transition>
+    </mc:Choice>
+    <mc:Fallback>
+      <p:transition advTm="30000">
+        <p:sndAc>
+          <p:stSnd>
+            <p:snd r:embed="rId2" name="click.wav"/>
+          </p:stSnd>
+        </p:sndAc>
+      </p:transition>
+    </mc:Fallback>
+  </mc:AlternateContent>
+</p:sld>
+</file>
+
+<file path=ppt/slides/slide31.xml><?xml version="1.0" encoding="utf-8"?>
+<p:sld xmlns:a="http://schemas.openxmlformats.org/drawingml/2006/main" xmlns:r="http://schemas.openxmlformats.org/officeDocument/2006/relationships" xmlns:p="http://schemas.openxmlformats.org/presentationml/2006/main">
+  <p:cSld>
+    <p:spTree>
+      <p:nvGrpSpPr>
+        <p:cNvPr id="1" name="">
+          <a:extLst>
+            <a:ext uri="{FF2B5EF4-FFF2-40B4-BE49-F238E27FC236}">
+              <a16:creationId xmlns:a16="http://schemas.microsoft.com/office/drawing/2014/main" id="{E4D28745-7777-0BB2-A9F9-CC8FF2F75572}"/>
+            </a:ext>
+          </a:extLst>
+        </p:cNvPr>
+        <p:cNvGrpSpPr/>
+        <p:nvPr/>
+      </p:nvGrpSpPr>
+      <p:grpSpPr>
+        <a:xfrm>
+          <a:off x="0" y="0"/>
+          <a:ext cx="0" cy="0"/>
+          <a:chOff x="0" y="0"/>
+          <a:chExt cx="0" cy="0"/>
+        </a:xfrm>
+      </p:grpSpPr>
+      <p:sp>
+        <p:nvSpPr>
+          <p:cNvPr id="2" name="Title 1">
+            <a:extLst>
+              <a:ext uri="{FF2B5EF4-FFF2-40B4-BE49-F238E27FC236}">
+                <a16:creationId xmlns:a16="http://schemas.microsoft.com/office/drawing/2014/main" id="{AE3EDBBB-0AA1-D4E2-E2A4-7B7D262FEF4D}"/>
+              </a:ext>
+            </a:extLst>
+          </p:cNvPr>
+          <p:cNvSpPr>
+            <a:spLocks noGrp="1"/>
+          </p:cNvSpPr>
+          <p:nvPr>
+            <p:ph type="title"/>
+          </p:nvPr>
+        </p:nvSpPr>
+        <p:spPr/>
+        <p:txBody>
+          <a:bodyPr/>
+          <a:lstStyle/>
+          <a:p>
+            <a:endParaRPr lang="en-US"/>
+          </a:p>
+        </p:txBody>
+      </p:sp>
+      <p:pic>
+        <p:nvPicPr>
+          <p:cNvPr id="6" name="Content Placeholder 5">
+            <a:extLst>
+              <a:ext uri="{FF2B5EF4-FFF2-40B4-BE49-F238E27FC236}">
+                <a16:creationId xmlns:a16="http://schemas.microsoft.com/office/drawing/2014/main" id="{8833C4F1-115A-CB71-F175-30BC0D4ED540}"/>
+              </a:ext>
+            </a:extLst>
+          </p:cNvPr>
+          <p:cNvPicPr>
+            <a:picLocks noGrp="1" noChangeAspect="1"/>
+          </p:cNvPicPr>
+          <p:nvPr>
+            <p:ph idx="1"/>
+          </p:nvPr>
+        </p:nvPicPr>
+        <p:blipFill>
+          <a:blip r:embed="rId3">
+            <a:extLst>
+              <a:ext uri="{28A0092B-C50C-407E-A947-70E740481C1C}">
+                <a14:useLocalDpi xmlns:a14="http://schemas.microsoft.com/office/drawing/2010/main" val="0"/>
+              </a:ext>
+            </a:extLst>
+          </a:blip>
+          <a:stretch>
+            <a:fillRect/>
+          </a:stretch>
+        </p:blipFill>
+        <p:spPr>
+          <a:xfrm>
+            <a:off x="1513835" y="2724051"/>
+            <a:ext cx="9164329" cy="1409897"/>
+          </a:xfrm>
+          <a:prstGeom prst="rect">
+            <a:avLst/>
+          </a:prstGeom>
+        </p:spPr>
+      </p:pic>
+    </p:spTree>
+    <p:extLst>
+      <p:ext uri="{BB962C8B-B14F-4D97-AF65-F5344CB8AC3E}">
+        <p14:creationId xmlns:p14="http://schemas.microsoft.com/office/powerpoint/2010/main" val="1462982736"/>
+      </p:ext>
+    </p:extLst>
+  </p:cSld>
+  <p:clrMapOvr>
+    <a:masterClrMapping/>
+  </p:clrMapOvr>
+  <mc:AlternateContent xmlns:mc="http://schemas.openxmlformats.org/markup-compatibility/2006">
+    <mc:Choice xmlns:p14="http://schemas.microsoft.com/office/powerpoint/2010/main" Requires="p14">
+      <p:transition p14:dur="10" advTm="30000">
+        <p:sndAc>
+          <p:stSnd>
+            <p:snd r:embed="rId2" name="click.wav"/>
+          </p:stSnd>
+        </p:sndAc>
+      </p:transition>
+    </mc:Choice>
+    <mc:Fallback>
+      <p:transition advTm="30000">
+        <p:sndAc>
+          <p:stSnd>
+            <p:snd r:embed="rId2" name="click.wav"/>
+          </p:stSnd>
+        </p:sndAc>
+      </p:transition>
+    </mc:Fallback>
+  </mc:AlternateContent>
+</p:sld>
+</file>
+
+<file path=ppt/slides/slide32.xml><?xml version="1.0" encoding="utf-8"?>
+<p:sld xmlns:a="http://schemas.openxmlformats.org/drawingml/2006/main" xmlns:r="http://schemas.openxmlformats.org/officeDocument/2006/relationships" xmlns:p="http://schemas.openxmlformats.org/presentationml/2006/main">
+  <p:cSld>
+    <p:spTree>
+      <p:nvGrpSpPr>
+        <p:cNvPr id="1" name="">
+          <a:extLst>
+            <a:ext uri="{FF2B5EF4-FFF2-40B4-BE49-F238E27FC236}">
+              <a16:creationId xmlns:a16="http://schemas.microsoft.com/office/drawing/2014/main" id="{7BA682DB-27E6-4F70-9CF5-5AD6E60C9D67}"/>
+            </a:ext>
+          </a:extLst>
+        </p:cNvPr>
+        <p:cNvGrpSpPr/>
+        <p:nvPr/>
+      </p:nvGrpSpPr>
+      <p:grpSpPr>
+        <a:xfrm>
+          <a:off x="0" y="0"/>
+          <a:ext cx="0" cy="0"/>
+          <a:chOff x="0" y="0"/>
+          <a:chExt cx="0" cy="0"/>
+        </a:xfrm>
+      </p:grpSpPr>
+      <p:sp>
+        <p:nvSpPr>
+          <p:cNvPr id="2" name="Title 1">
+            <a:extLst>
+              <a:ext uri="{FF2B5EF4-FFF2-40B4-BE49-F238E27FC236}">
+                <a16:creationId xmlns:a16="http://schemas.microsoft.com/office/drawing/2014/main" id="{43FC069E-CF5A-2E15-D53E-5FEA8B5BC6EB}"/>
+              </a:ext>
+            </a:extLst>
+          </p:cNvPr>
+          <p:cNvSpPr>
+            <a:spLocks noGrp="1"/>
+          </p:cNvSpPr>
+          <p:nvPr>
+            <p:ph type="title"/>
+          </p:nvPr>
+        </p:nvSpPr>
+        <p:spPr/>
+        <p:txBody>
+          <a:bodyPr/>
+          <a:lstStyle/>
+          <a:p>
+            <a:endParaRPr lang="en-US"/>
+          </a:p>
+        </p:txBody>
+      </p:sp>
+      <p:pic>
+        <p:nvPicPr>
+          <p:cNvPr id="7" name="Content Placeholder 6">
+            <a:extLst>
+              <a:ext uri="{FF2B5EF4-FFF2-40B4-BE49-F238E27FC236}">
+                <a16:creationId xmlns:a16="http://schemas.microsoft.com/office/drawing/2014/main" id="{FEA24B73-F0D6-0F29-672C-739DEE22C366}"/>
+              </a:ext>
+            </a:extLst>
+          </p:cNvPr>
+          <p:cNvPicPr>
+            <a:picLocks noGrp="1" noChangeAspect="1"/>
+          </p:cNvPicPr>
+          <p:nvPr>
+            <p:ph idx="1"/>
+          </p:nvPr>
+        </p:nvPicPr>
+        <p:blipFill>
+          <a:blip r:embed="rId3">
+            <a:extLst>
+              <a:ext uri="{28A0092B-C50C-407E-A947-70E740481C1C}">
+                <a14:useLocalDpi xmlns:a14="http://schemas.microsoft.com/office/drawing/2010/main" val="0"/>
+              </a:ext>
+            </a:extLst>
+          </a:blip>
+          <a:stretch>
+            <a:fillRect/>
+          </a:stretch>
+        </p:blipFill>
+        <p:spPr>
+          <a:xfrm>
+            <a:off x="880334" y="2333472"/>
+            <a:ext cx="10431331" cy="2191056"/>
+          </a:xfrm>
+          <a:prstGeom prst="rect">
+            <a:avLst/>
+          </a:prstGeom>
+        </p:spPr>
+      </p:pic>
+    </p:spTree>
+    <p:extLst>
+      <p:ext uri="{BB962C8B-B14F-4D97-AF65-F5344CB8AC3E}">
+        <p14:creationId xmlns:p14="http://schemas.microsoft.com/office/powerpoint/2010/main" val="381419087"/>
+      </p:ext>
+    </p:extLst>
+  </p:cSld>
+  <p:clrMapOvr>
+    <a:masterClrMapping/>
+  </p:clrMapOvr>
+  <mc:AlternateContent xmlns:mc="http://schemas.openxmlformats.org/markup-compatibility/2006">
+    <mc:Choice xmlns:p14="http://schemas.microsoft.com/office/powerpoint/2010/main" Requires="p14">
+      <p:transition p14:dur="10" advTm="30000">
+        <p:sndAc>
+          <p:stSnd>
+            <p:snd r:embed="rId2" name="click.wav"/>
+          </p:stSnd>
+        </p:sndAc>
+      </p:transition>
+    </mc:Choice>
+    <mc:Fallback>
+      <p:transition advTm="30000">
+        <p:sndAc>
+          <p:stSnd>
+            <p:snd r:embed="rId2" name="click.wav"/>
+          </p:stSnd>
+        </p:sndAc>
+      </p:transition>
+    </mc:Fallback>
+  </mc:AlternateContent>
+</p:sld>
+</file>
+
+<file path=ppt/slides/slide33.xml><?xml version="1.0" encoding="utf-8"?>
+<p:sld xmlns:a="http://schemas.openxmlformats.org/drawingml/2006/main" xmlns:r="http://schemas.openxmlformats.org/officeDocument/2006/relationships" xmlns:p="http://schemas.openxmlformats.org/presentationml/2006/main">
+  <p:cSld>
+    <p:spTree>
+      <p:nvGrpSpPr>
+        <p:cNvPr id="1" name="">
+          <a:extLst>
+            <a:ext uri="{FF2B5EF4-FFF2-40B4-BE49-F238E27FC236}">
+              <a16:creationId xmlns:a16="http://schemas.microsoft.com/office/drawing/2014/main" id="{6B9CB689-18F3-5B8C-5F6D-C869C2F0C7F3}"/>
+            </a:ext>
+          </a:extLst>
+        </p:cNvPr>
+        <p:cNvGrpSpPr/>
+        <p:nvPr/>
+      </p:nvGrpSpPr>
+      <p:grpSpPr>
+        <a:xfrm>
+          <a:off x="0" y="0"/>
+          <a:ext cx="0" cy="0"/>
+          <a:chOff x="0" y="0"/>
+          <a:chExt cx="0" cy="0"/>
+        </a:xfrm>
+      </p:grpSpPr>
+      <p:sp>
+        <p:nvSpPr>
+          <p:cNvPr id="2" name="Title 1">
+            <a:extLst>
+              <a:ext uri="{FF2B5EF4-FFF2-40B4-BE49-F238E27FC236}">
+                <a16:creationId xmlns:a16="http://schemas.microsoft.com/office/drawing/2014/main" id="{661F08A7-FF90-E03F-C0AB-5C73CF4E4F03}"/>
+              </a:ext>
+            </a:extLst>
+          </p:cNvPr>
+          <p:cNvSpPr>
+            <a:spLocks noGrp="1"/>
+          </p:cNvSpPr>
+          <p:nvPr>
+            <p:ph type="title"/>
+          </p:nvPr>
+        </p:nvSpPr>
+        <p:spPr/>
+        <p:txBody>
+          <a:bodyPr/>
+          <a:lstStyle/>
+          <a:p>
+            <a:endParaRPr lang="en-US"/>
+          </a:p>
+        </p:txBody>
+      </p:sp>
+      <p:pic>
+        <p:nvPicPr>
+          <p:cNvPr id="6" name="Content Placeholder 5">
+            <a:extLst>
+              <a:ext uri="{FF2B5EF4-FFF2-40B4-BE49-F238E27FC236}">
+                <a16:creationId xmlns:a16="http://schemas.microsoft.com/office/drawing/2014/main" id="{04833AF6-CBF1-99CB-939C-CD8EDF66CE2C}"/>
+              </a:ext>
+            </a:extLst>
+          </p:cNvPr>
+          <p:cNvPicPr>
+            <a:picLocks noGrp="1" noChangeAspect="1"/>
+          </p:cNvPicPr>
+          <p:nvPr>
+            <p:ph idx="1"/>
+          </p:nvPr>
+        </p:nvPicPr>
+        <p:blipFill>
+          <a:blip r:embed="rId3">
+            <a:extLst>
+              <a:ext uri="{28A0092B-C50C-407E-A947-70E740481C1C}">
+                <a14:useLocalDpi xmlns:a14="http://schemas.microsoft.com/office/drawing/2010/main" val="0"/>
+              </a:ext>
+            </a:extLst>
+          </a:blip>
+          <a:stretch>
+            <a:fillRect/>
+          </a:stretch>
+        </p:blipFill>
+        <p:spPr>
+          <a:xfrm>
+            <a:off x="838200" y="1335396"/>
+            <a:ext cx="10515600" cy="4187207"/>
+          </a:xfrm>
+          <a:prstGeom prst="rect">
+            <a:avLst/>
+          </a:prstGeom>
+        </p:spPr>
+      </p:pic>
+    </p:spTree>
+    <p:extLst>
+      <p:ext uri="{BB962C8B-B14F-4D97-AF65-F5344CB8AC3E}">
+        <p14:creationId xmlns:p14="http://schemas.microsoft.com/office/powerpoint/2010/main" val="1589602955"/>
+      </p:ext>
+    </p:extLst>
+  </p:cSld>
+  <p:clrMapOvr>
+    <a:masterClrMapping/>
+  </p:clrMapOvr>
+  <mc:AlternateContent xmlns:mc="http://schemas.openxmlformats.org/markup-compatibility/2006">
+    <mc:Choice xmlns:p14="http://schemas.microsoft.com/office/powerpoint/2010/main" Requires="p14">
+      <p:transition p14:dur="10" advTm="30000">
+        <p:sndAc>
+          <p:stSnd>
+            <p:snd r:embed="rId2" name="click.wav"/>
+          </p:stSnd>
+        </p:sndAc>
+      </p:transition>
+    </mc:Choice>
+    <mc:Fallback>
+      <p:transition advTm="30000">
+        <p:sndAc>
+          <p:stSnd>
+            <p:snd r:embed="rId2" name="click.wav"/>
+          </p:stSnd>
+        </p:sndAc>
+      </p:transition>
+    </mc:Fallback>
+  </mc:AlternateContent>
+</p:sld>
+</file>
+
+<file path=ppt/slides/slide34.xml><?xml version="1.0" encoding="utf-8"?>
+<p:sld xmlns:a="http://schemas.openxmlformats.org/drawingml/2006/main" xmlns:r="http://schemas.openxmlformats.org/officeDocument/2006/relationships" xmlns:p="http://schemas.openxmlformats.org/presentationml/2006/main">
+  <p:cSld>
+    <p:spTree>
+      <p:nvGrpSpPr>
+        <p:cNvPr id="1" name="">
+          <a:extLst>
+            <a:ext uri="{FF2B5EF4-FFF2-40B4-BE49-F238E27FC236}">
+              <a16:creationId xmlns:a16="http://schemas.microsoft.com/office/drawing/2014/main" id="{5950D088-2BC4-913D-5BC2-C06ED9672390}"/>
+            </a:ext>
+          </a:extLst>
+        </p:cNvPr>
+        <p:cNvGrpSpPr/>
+        <p:nvPr/>
+      </p:nvGrpSpPr>
+      <p:grpSpPr>
+        <a:xfrm>
+          <a:off x="0" y="0"/>
+          <a:ext cx="0" cy="0"/>
+          <a:chOff x="0" y="0"/>
+          <a:chExt cx="0" cy="0"/>
+        </a:xfrm>
+      </p:grpSpPr>
+      <p:sp>
+        <p:nvSpPr>
+          <p:cNvPr id="2" name="Title 1">
+            <a:extLst>
+              <a:ext uri="{FF2B5EF4-FFF2-40B4-BE49-F238E27FC236}">
+                <a16:creationId xmlns:a16="http://schemas.microsoft.com/office/drawing/2014/main" id="{E840DB54-BA4B-1D51-49D5-6A3CB60C2679}"/>
+              </a:ext>
+            </a:extLst>
+          </p:cNvPr>
+          <p:cNvSpPr>
+            <a:spLocks noGrp="1"/>
+          </p:cNvSpPr>
+          <p:nvPr>
+            <p:ph type="title"/>
+          </p:nvPr>
+        </p:nvSpPr>
+        <p:spPr/>
+        <p:txBody>
+          <a:bodyPr/>
+          <a:lstStyle/>
+          <a:p>
+            <a:endParaRPr lang="en-US"/>
+          </a:p>
+        </p:txBody>
+      </p:sp>
+      <p:pic>
+        <p:nvPicPr>
+          <p:cNvPr id="7" name="Content Placeholder 6">
+            <a:extLst>
+              <a:ext uri="{FF2B5EF4-FFF2-40B4-BE49-F238E27FC236}">
+                <a16:creationId xmlns:a16="http://schemas.microsoft.com/office/drawing/2014/main" id="{4801F1F0-5E6C-53E6-F23F-4FEFD7106096}"/>
+              </a:ext>
+            </a:extLst>
+          </p:cNvPr>
+          <p:cNvPicPr>
+            <a:picLocks noGrp="1" noChangeAspect="1"/>
+          </p:cNvPicPr>
+          <p:nvPr>
+            <p:ph idx="1"/>
+          </p:nvPr>
+        </p:nvPicPr>
+        <p:blipFill>
+          <a:blip r:embed="rId3">
+            <a:extLst>
+              <a:ext uri="{28A0092B-C50C-407E-A947-70E740481C1C}">
+                <a14:useLocalDpi xmlns:a14="http://schemas.microsoft.com/office/drawing/2010/main" val="0"/>
+              </a:ext>
+            </a:extLst>
+          </a:blip>
+          <a:stretch>
+            <a:fillRect/>
+          </a:stretch>
+        </p:blipFill>
+        <p:spPr>
+          <a:xfrm>
+            <a:off x="838200" y="2151707"/>
+            <a:ext cx="10515600" cy="2554585"/>
+          </a:xfrm>
+          <a:prstGeom prst="rect">
+            <a:avLst/>
+          </a:prstGeom>
+        </p:spPr>
+      </p:pic>
+    </p:spTree>
+    <p:extLst>
+      <p:ext uri="{BB962C8B-B14F-4D97-AF65-F5344CB8AC3E}">
+        <p14:creationId xmlns:p14="http://schemas.microsoft.com/office/powerpoint/2010/main" val="3657670701"/>
+      </p:ext>
+    </p:extLst>
+  </p:cSld>
+  <p:clrMapOvr>
+    <a:masterClrMapping/>
+  </p:clrMapOvr>
+  <mc:AlternateContent xmlns:mc="http://schemas.openxmlformats.org/markup-compatibility/2006">
+    <mc:Choice xmlns:p14="http://schemas.microsoft.com/office/powerpoint/2010/main" Requires="p14">
+      <p:transition p14:dur="10" advTm="30000">
+        <p:sndAc>
+          <p:stSnd>
+            <p:snd r:embed="rId2" name="click.wav"/>
+          </p:stSnd>
+        </p:sndAc>
+      </p:transition>
+    </mc:Choice>
+    <mc:Fallback>
+      <p:transition advTm="30000">
+        <p:sndAc>
+          <p:stSnd>
+            <p:snd r:embed="rId2" name="click.wav"/>
+          </p:stSnd>
+        </p:sndAc>
+      </p:transition>
+    </mc:Fallback>
+  </mc:AlternateContent>
+</p:sld>
+</file>
+
+<file path=ppt/slides/slide35.xml><?xml version="1.0" encoding="utf-8"?>
+<p:sld xmlns:a="http://schemas.openxmlformats.org/drawingml/2006/main" xmlns:r="http://schemas.openxmlformats.org/officeDocument/2006/relationships" xmlns:p="http://schemas.openxmlformats.org/presentationml/2006/main">
+  <p:cSld>
+    <p:spTree>
+      <p:nvGrpSpPr>
+        <p:cNvPr id="1" name="">
+          <a:extLst>
+            <a:ext uri="{FF2B5EF4-FFF2-40B4-BE49-F238E27FC236}">
+              <a16:creationId xmlns:a16="http://schemas.microsoft.com/office/drawing/2014/main" id="{76C5ED5D-0523-AB50-098A-F6C89C66F44C}"/>
+            </a:ext>
+          </a:extLst>
+        </p:cNvPr>
+        <p:cNvGrpSpPr/>
+        <p:nvPr/>
+      </p:nvGrpSpPr>
+      <p:grpSpPr>
+        <a:xfrm>
+          <a:off x="0" y="0"/>
+          <a:ext cx="0" cy="0"/>
+          <a:chOff x="0" y="0"/>
+          <a:chExt cx="0" cy="0"/>
+        </a:xfrm>
+      </p:grpSpPr>
+      <p:pic>
+        <p:nvPicPr>
+          <p:cNvPr id="6" name="Picture 5">
+            <a:extLst>
+              <a:ext uri="{FF2B5EF4-FFF2-40B4-BE49-F238E27FC236}">
+                <a16:creationId xmlns:a16="http://schemas.microsoft.com/office/drawing/2014/main" id="{19028262-A3D2-E267-AABE-65D9E7DE0EC4}"/>
+              </a:ext>
+            </a:extLst>
+          </p:cNvPr>
+          <p:cNvPicPr>
+            <a:picLocks noChangeAspect="1"/>
+          </p:cNvPicPr>
+          <p:nvPr/>
+        </p:nvPicPr>
+        <p:blipFill>
+          <a:blip r:embed="rId3">
+            <a:extLst>
+              <a:ext uri="{28A0092B-C50C-407E-A947-70E740481C1C}">
+                <a14:useLocalDpi xmlns:a14="http://schemas.microsoft.com/office/drawing/2010/main" val="0"/>
+              </a:ext>
+            </a:extLst>
+          </a:blip>
+          <a:stretch>
+            <a:fillRect/>
+          </a:stretch>
+        </p:blipFill>
+        <p:spPr>
+          <a:xfrm>
+            <a:off x="999413" y="2181051"/>
+            <a:ext cx="10193173" cy="2495898"/>
+          </a:xfrm>
+          <a:prstGeom prst="rect">
+            <a:avLst/>
+          </a:prstGeom>
+        </p:spPr>
+      </p:pic>
+    </p:spTree>
+    <p:extLst>
+      <p:ext uri="{BB962C8B-B14F-4D97-AF65-F5344CB8AC3E}">
+        <p14:creationId xmlns:p14="http://schemas.microsoft.com/office/powerpoint/2010/main" val="965919791"/>
+      </p:ext>
+    </p:extLst>
+  </p:cSld>
+  <p:clrMapOvr>
+    <a:masterClrMapping/>
+  </p:clrMapOvr>
+  <mc:AlternateContent xmlns:mc="http://schemas.openxmlformats.org/markup-compatibility/2006">
+    <mc:Choice xmlns:p14="http://schemas.microsoft.com/office/powerpoint/2010/main" Requires="p14">
+      <p:transition p14:dur="10" advTm="30000">
+        <p:sndAc>
+          <p:stSnd>
+            <p:snd r:embed="rId2" name="click.wav"/>
+          </p:stSnd>
+        </p:sndAc>
+      </p:transition>
+    </mc:Choice>
+    <mc:Fallback>
+      <p:transition advTm="30000">
+        <p:sndAc>
+          <p:stSnd>
+            <p:snd r:embed="rId2" name="click.wav"/>
+          </p:stSnd>
+        </p:sndAc>
+      </p:transition>
+    </mc:Fallback>
+  </mc:AlternateContent>
+</p:sld>
+</file>
+
+<file path=ppt/slides/slide36.xml><?xml version="1.0" encoding="utf-8"?>
+<p:sld xmlns:a="http://schemas.openxmlformats.org/drawingml/2006/main" xmlns:r="http://schemas.openxmlformats.org/officeDocument/2006/relationships" xmlns:p="http://schemas.openxmlformats.org/presentationml/2006/main">
+  <p:cSld>
+    <p:spTree>
+      <p:nvGrpSpPr>
+        <p:cNvPr id="1" name="">
+          <a:extLst>
+            <a:ext uri="{FF2B5EF4-FFF2-40B4-BE49-F238E27FC236}">
+              <a16:creationId xmlns:a16="http://schemas.microsoft.com/office/drawing/2014/main" id="{FC71ED2F-43EE-8754-5275-9CA7B63FCEF0}"/>
+            </a:ext>
+          </a:extLst>
+        </p:cNvPr>
+        <p:cNvGrpSpPr/>
+        <p:nvPr/>
+      </p:nvGrpSpPr>
+      <p:grpSpPr>
+        <a:xfrm>
+          <a:off x="0" y="0"/>
+          <a:ext cx="0" cy="0"/>
+          <a:chOff x="0" y="0"/>
+          <a:chExt cx="0" cy="0"/>
+        </a:xfrm>
+      </p:grpSpPr>
+      <p:pic>
+        <p:nvPicPr>
+          <p:cNvPr id="3" name="Picture 2">
+            <a:extLst>
+              <a:ext uri="{FF2B5EF4-FFF2-40B4-BE49-F238E27FC236}">
+                <a16:creationId xmlns:a16="http://schemas.microsoft.com/office/drawing/2014/main" id="{2F34BA67-9837-DFCF-A6C3-CA3ADF834529}"/>
+              </a:ext>
+            </a:extLst>
+          </p:cNvPr>
+          <p:cNvPicPr>
+            <a:picLocks noChangeAspect="1"/>
+          </p:cNvPicPr>
+          <p:nvPr/>
+        </p:nvPicPr>
+        <p:blipFill>
+          <a:blip r:embed="rId3">
+            <a:extLst>
+              <a:ext uri="{28A0092B-C50C-407E-A947-70E740481C1C}">
+                <a14:useLocalDpi xmlns:a14="http://schemas.microsoft.com/office/drawing/2010/main" val="0"/>
+              </a:ext>
+            </a:extLst>
+          </a:blip>
+          <a:stretch>
+            <a:fillRect/>
+          </a:stretch>
+        </p:blipFill>
+        <p:spPr>
+          <a:xfrm>
+            <a:off x="0" y="234347"/>
+            <a:ext cx="12192000" cy="6389306"/>
+          </a:xfrm>
+          <a:prstGeom prst="rect">
+            <a:avLst/>
+          </a:prstGeom>
+        </p:spPr>
+      </p:pic>
+    </p:spTree>
+    <p:extLst>
+      <p:ext uri="{BB962C8B-B14F-4D97-AF65-F5344CB8AC3E}">
+        <p14:creationId xmlns:p14="http://schemas.microsoft.com/office/powerpoint/2010/main" val="2405943052"/>
+      </p:ext>
+    </p:extLst>
+  </p:cSld>
+  <p:clrMapOvr>
+    <a:masterClrMapping/>
+  </p:clrMapOvr>
+  <mc:AlternateContent xmlns:mc="http://schemas.openxmlformats.org/markup-compatibility/2006">
+    <mc:Choice xmlns:p14="http://schemas.microsoft.com/office/powerpoint/2010/main" Requires="p14">
+      <p:transition p14:dur="10" advTm="30000">
+        <p:sndAc>
+          <p:stSnd>
+            <p:snd r:embed="rId2" name="click.wav"/>
+          </p:stSnd>
+        </p:sndAc>
+      </p:transition>
+    </mc:Choice>
+    <mc:Fallback>
+      <p:transition advTm="30000">
+        <p:sndAc>
+          <p:stSnd>
+            <p:snd r:embed="rId2" name="click.wav"/>
+          </p:stSnd>
+        </p:sndAc>
+      </p:transition>
+    </mc:Fallback>
+  </mc:AlternateContent>
+</p:sld>
+</file>
+
+<file path=ppt/slides/slide37.xml><?xml version="1.0" encoding="utf-8"?>
+<p:sld xmlns:a="http://schemas.openxmlformats.org/drawingml/2006/main" xmlns:r="http://schemas.openxmlformats.org/officeDocument/2006/relationships" xmlns:p="http://schemas.openxmlformats.org/presentationml/2006/main">
+  <p:cSld>
+    <p:spTree>
+      <p:nvGrpSpPr>
+        <p:cNvPr id="1" name="">
+          <a:extLst>
+            <a:ext uri="{FF2B5EF4-FFF2-40B4-BE49-F238E27FC236}">
+              <a16:creationId xmlns:a16="http://schemas.microsoft.com/office/drawing/2014/main" id="{9906BB71-E854-9A76-0ABE-C4A0A2CE07BF}"/>
+            </a:ext>
+          </a:extLst>
+        </p:cNvPr>
+        <p:cNvGrpSpPr/>
+        <p:nvPr/>
+      </p:nvGrpSpPr>
+      <p:grpSpPr>
+        <a:xfrm>
+          <a:off x="0" y="0"/>
+          <a:ext cx="0" cy="0"/>
+          <a:chOff x="0" y="0"/>
+          <a:chExt cx="0" cy="0"/>
+        </a:xfrm>
+      </p:grpSpPr>
+      <p:pic>
+        <p:nvPicPr>
+          <p:cNvPr id="4" name="Picture 3">
+            <a:extLst>
+              <a:ext uri="{FF2B5EF4-FFF2-40B4-BE49-F238E27FC236}">
+                <a16:creationId xmlns:a16="http://schemas.microsoft.com/office/drawing/2014/main" id="{9968FFAD-2C45-8AD9-A2AB-077261F26D73}"/>
+              </a:ext>
+            </a:extLst>
+          </p:cNvPr>
+          <p:cNvPicPr>
+            <a:picLocks noChangeAspect="1"/>
+          </p:cNvPicPr>
+          <p:nvPr/>
+        </p:nvPicPr>
+        <p:blipFill>
+          <a:blip r:embed="rId3">
+            <a:extLst>
+              <a:ext uri="{28A0092B-C50C-407E-A947-70E740481C1C}">
+                <a14:useLocalDpi xmlns:a14="http://schemas.microsoft.com/office/drawing/2010/main" val="0"/>
+              </a:ext>
+            </a:extLst>
+          </a:blip>
+          <a:stretch>
+            <a:fillRect/>
+          </a:stretch>
+        </p:blipFill>
+        <p:spPr>
+          <a:xfrm>
+            <a:off x="518334" y="2309656"/>
+            <a:ext cx="11155332" cy="2238687"/>
+          </a:xfrm>
+          <a:prstGeom prst="rect">
+            <a:avLst/>
+          </a:prstGeom>
+        </p:spPr>
+      </p:pic>
+    </p:spTree>
+    <p:extLst>
+      <p:ext uri="{BB962C8B-B14F-4D97-AF65-F5344CB8AC3E}">
+        <p14:creationId xmlns:p14="http://schemas.microsoft.com/office/powerpoint/2010/main" val="2847833760"/>
+      </p:ext>
+    </p:extLst>
+  </p:cSld>
+  <p:clrMapOvr>
+    <a:masterClrMapping/>
+  </p:clrMapOvr>
+  <mc:AlternateContent xmlns:mc="http://schemas.openxmlformats.org/markup-compatibility/2006">
+    <mc:Choice xmlns:p14="http://schemas.microsoft.com/office/powerpoint/2010/main" Requires="p14">
+      <p:transition p14:dur="10" advTm="30000">
+        <p:sndAc>
+          <p:stSnd>
+            <p:snd r:embed="rId2" name="click.wav"/>
+          </p:stSnd>
+        </p:sndAc>
+      </p:transition>
+    </mc:Choice>
+    <mc:Fallback>
+      <p:transition advTm="30000">
+        <p:sndAc>
+          <p:stSnd>
+            <p:snd r:embed="rId2" name="click.wav"/>
+          </p:stSnd>
+        </p:sndAc>
+      </p:transition>
+    </mc:Fallback>
+  </mc:AlternateContent>
+</p:sld>
+</file>
+
+<file path=ppt/slides/slide38.xml><?xml version="1.0" encoding="utf-8"?>
+<p:sld xmlns:a="http://schemas.openxmlformats.org/drawingml/2006/main" xmlns:r="http://schemas.openxmlformats.org/officeDocument/2006/relationships" xmlns:p="http://schemas.openxmlformats.org/presentationml/2006/main">
+  <p:cSld>
+    <p:spTree>
+      <p:nvGrpSpPr>
+        <p:cNvPr id="1" name="">
+          <a:extLst>
+            <a:ext uri="{FF2B5EF4-FFF2-40B4-BE49-F238E27FC236}">
+              <a16:creationId xmlns:a16="http://schemas.microsoft.com/office/drawing/2014/main" id="{C0CB6460-880A-F51E-D543-ABC378D89E61}"/>
+            </a:ext>
+          </a:extLst>
+        </p:cNvPr>
+        <p:cNvGrpSpPr/>
+        <p:nvPr/>
+      </p:nvGrpSpPr>
+      <p:grpSpPr>
+        <a:xfrm>
+          <a:off x="0" y="0"/>
+          <a:ext cx="0" cy="0"/>
+          <a:chOff x="0" y="0"/>
+          <a:chExt cx="0" cy="0"/>
+        </a:xfrm>
+      </p:grpSpPr>
+      <p:pic>
+        <p:nvPicPr>
+          <p:cNvPr id="3" name="Picture 2">
+            <a:extLst>
+              <a:ext uri="{FF2B5EF4-FFF2-40B4-BE49-F238E27FC236}">
+                <a16:creationId xmlns:a16="http://schemas.microsoft.com/office/drawing/2014/main" id="{B131F215-514F-A21A-9A38-1E9B6EBA10D4}"/>
+              </a:ext>
+            </a:extLst>
+          </p:cNvPr>
+          <p:cNvPicPr>
+            <a:picLocks noChangeAspect="1"/>
+          </p:cNvPicPr>
+          <p:nvPr/>
+        </p:nvPicPr>
+        <p:blipFill>
+          <a:blip r:embed="rId3">
+            <a:extLst>
+              <a:ext uri="{28A0092B-C50C-407E-A947-70E740481C1C}">
+                <a14:useLocalDpi xmlns:a14="http://schemas.microsoft.com/office/drawing/2010/main" val="0"/>
+              </a:ext>
+            </a:extLst>
+          </a:blip>
+          <a:stretch>
+            <a:fillRect/>
+          </a:stretch>
+        </p:blipFill>
+        <p:spPr>
+          <a:xfrm>
+            <a:off x="1027992" y="2052445"/>
+            <a:ext cx="10136015" cy="2753109"/>
+          </a:xfrm>
+          <a:prstGeom prst="rect">
+            <a:avLst/>
+          </a:prstGeom>
+        </p:spPr>
+      </p:pic>
+    </p:spTree>
+    <p:extLst>
+      <p:ext uri="{BB962C8B-B14F-4D97-AF65-F5344CB8AC3E}">
+        <p14:creationId xmlns:p14="http://schemas.microsoft.com/office/powerpoint/2010/main" val="3529673574"/>
+      </p:ext>
+    </p:extLst>
+  </p:cSld>
+  <p:clrMapOvr>
+    <a:masterClrMapping/>
+  </p:clrMapOvr>
+  <mc:AlternateContent xmlns:mc="http://schemas.openxmlformats.org/markup-compatibility/2006">
+    <mc:Choice xmlns:p14="http://schemas.microsoft.com/office/powerpoint/2010/main" Requires="p14">
+      <p:transition p14:dur="10" advTm="30000">
+        <p:sndAc>
+          <p:stSnd>
+            <p:snd r:embed="rId2" name="click.wav"/>
+          </p:stSnd>
+        </p:sndAc>
+      </p:transition>
+    </mc:Choice>
+    <mc:Fallback>
+      <p:transition advTm="30000">
+        <p:sndAc>
+          <p:stSnd>
+            <p:snd r:embed="rId2" name="click.wav"/>
+          </p:stSnd>
+        </p:sndAc>
+      </p:transition>
+    </mc:Fallback>
+  </mc:AlternateContent>
+</p:sld>
+</file>
+
+<file path=ppt/slides/slide39.xml><?xml version="1.0" encoding="utf-8"?>
+<p:sld xmlns:a="http://schemas.openxmlformats.org/drawingml/2006/main" xmlns:r="http://schemas.openxmlformats.org/officeDocument/2006/relationships" xmlns:p="http://schemas.openxmlformats.org/presentationml/2006/main">
+  <p:cSld>
+    <p:spTree>
+      <p:nvGrpSpPr>
+        <p:cNvPr id="1" name="">
+          <a:extLst>
+            <a:ext uri="{FF2B5EF4-FFF2-40B4-BE49-F238E27FC236}">
+              <a16:creationId xmlns:a16="http://schemas.microsoft.com/office/drawing/2014/main" id="{A2529E07-46D0-C125-34D6-0CFB918D049B}"/>
+            </a:ext>
+          </a:extLst>
+        </p:cNvPr>
+        <p:cNvGrpSpPr/>
+        <p:nvPr/>
+      </p:nvGrpSpPr>
+      <p:grpSpPr>
+        <a:xfrm>
+          <a:off x="0" y="0"/>
+          <a:ext cx="0" cy="0"/>
+          <a:chOff x="0" y="0"/>
+          <a:chExt cx="0" cy="0"/>
+        </a:xfrm>
+      </p:grpSpPr>
+      <p:pic>
+        <p:nvPicPr>
+          <p:cNvPr id="4" name="Picture 3">
+            <a:extLst>
+              <a:ext uri="{FF2B5EF4-FFF2-40B4-BE49-F238E27FC236}">
+                <a16:creationId xmlns:a16="http://schemas.microsoft.com/office/drawing/2014/main" id="{953D0E50-3828-4514-6713-A031ABB948E6}"/>
+              </a:ext>
+            </a:extLst>
+          </p:cNvPr>
+          <p:cNvPicPr>
+            <a:picLocks noChangeAspect="1"/>
+          </p:cNvPicPr>
+          <p:nvPr/>
+        </p:nvPicPr>
+        <p:blipFill>
+          <a:blip r:embed="rId3">
+            <a:extLst>
+              <a:ext uri="{28A0092B-C50C-407E-A947-70E740481C1C}">
+                <a14:useLocalDpi xmlns:a14="http://schemas.microsoft.com/office/drawing/2010/main" val="0"/>
+              </a:ext>
+            </a:extLst>
+          </a:blip>
+          <a:stretch>
+            <a:fillRect/>
+          </a:stretch>
+        </p:blipFill>
+        <p:spPr>
+          <a:xfrm>
+            <a:off x="0" y="1827437"/>
+            <a:ext cx="12192000" cy="3203125"/>
+          </a:xfrm>
+          <a:prstGeom prst="rect">
+            <a:avLst/>
+          </a:prstGeom>
+        </p:spPr>
+      </p:pic>
+    </p:spTree>
+    <p:extLst>
+      <p:ext uri="{BB962C8B-B14F-4D97-AF65-F5344CB8AC3E}">
+        <p14:creationId xmlns:p14="http://schemas.microsoft.com/office/powerpoint/2010/main" val="3811698301"/>
+      </p:ext>
+    </p:extLst>
+  </p:cSld>
+  <p:clrMapOvr>
+    <a:masterClrMapping/>
+  </p:clrMapOvr>
+  <mc:AlternateContent xmlns:mc="http://schemas.openxmlformats.org/markup-compatibility/2006">
+    <mc:Choice xmlns:p14="http://schemas.microsoft.com/office/powerpoint/2010/main" Requires="p14">
+      <p:transition p14:dur="10" advTm="30000">
+        <p:sndAc>
+          <p:stSnd>
+            <p:snd r:embed="rId2" name="click.wav"/>
+          </p:stSnd>
+        </p:sndAc>
+      </p:transition>
+    </mc:Choice>
+    <mc:Fallback>
+      <p:transition advTm="30000">
+        <p:sndAc>
+          <p:stSnd>
+            <p:snd r:embed="rId2" name="click.wav"/>
+          </p:stSnd>
+        </p:sndAc>
+      </p:transition>
+    </mc:Fallback>
+  </mc:AlternateContent>
+</p:sld>
+</file>
+
 <file path=ppt/slides/slide4.xml><?xml version="1.0" encoding="utf-8"?>
 <p:sld xmlns:a="http://schemas.openxmlformats.org/drawingml/2006/main" xmlns:r="http://schemas.openxmlformats.org/officeDocument/2006/relationships" xmlns:p="http://schemas.openxmlformats.org/presentationml/2006/main">
   <p:cSld>
@@ -6117,6 +7785,282 @@
         <p:sndAc>
           <p:stSnd>
             <p:snd r:embed="rId4" name="click.wav"/>
+          </p:stSnd>
+        </p:sndAc>
+      </p:transition>
+    </mc:Fallback>
+  </mc:AlternateContent>
+</p:sld>
+</file>
+
+<file path=ppt/slides/slide40.xml><?xml version="1.0" encoding="utf-8"?>
+<p:sld xmlns:a="http://schemas.openxmlformats.org/drawingml/2006/main" xmlns:r="http://schemas.openxmlformats.org/officeDocument/2006/relationships" xmlns:p="http://schemas.openxmlformats.org/presentationml/2006/main">
+  <p:cSld>
+    <p:spTree>
+      <p:nvGrpSpPr>
+        <p:cNvPr id="1" name="">
+          <a:extLst>
+            <a:ext uri="{FF2B5EF4-FFF2-40B4-BE49-F238E27FC236}">
+              <a16:creationId xmlns:a16="http://schemas.microsoft.com/office/drawing/2014/main" id="{369D562B-65ED-730A-1F52-4809CABEAF6F}"/>
+            </a:ext>
+          </a:extLst>
+        </p:cNvPr>
+        <p:cNvGrpSpPr/>
+        <p:nvPr/>
+      </p:nvGrpSpPr>
+      <p:grpSpPr>
+        <a:xfrm>
+          <a:off x="0" y="0"/>
+          <a:ext cx="0" cy="0"/>
+          <a:chOff x="0" y="0"/>
+          <a:chExt cx="0" cy="0"/>
+        </a:xfrm>
+      </p:grpSpPr>
+      <p:pic>
+        <p:nvPicPr>
+          <p:cNvPr id="3" name="Picture 2">
+            <a:extLst>
+              <a:ext uri="{FF2B5EF4-FFF2-40B4-BE49-F238E27FC236}">
+                <a16:creationId xmlns:a16="http://schemas.microsoft.com/office/drawing/2014/main" id="{825E62D3-8BF7-9C42-FBB6-7A2A5FBA74B2}"/>
+              </a:ext>
+            </a:extLst>
+          </p:cNvPr>
+          <p:cNvPicPr>
+            <a:picLocks noChangeAspect="1"/>
+          </p:cNvPicPr>
+          <p:nvPr/>
+        </p:nvPicPr>
+        <p:blipFill>
+          <a:blip r:embed="rId3">
+            <a:extLst>
+              <a:ext uri="{28A0092B-C50C-407E-A947-70E740481C1C}">
+                <a14:useLocalDpi xmlns:a14="http://schemas.microsoft.com/office/drawing/2010/main" val="0"/>
+              </a:ext>
+            </a:extLst>
+          </a:blip>
+          <a:stretch>
+            <a:fillRect/>
+          </a:stretch>
+        </p:blipFill>
+        <p:spPr>
+          <a:xfrm>
+            <a:off x="0" y="1938429"/>
+            <a:ext cx="12192000" cy="2981141"/>
+          </a:xfrm>
+          <a:prstGeom prst="rect">
+            <a:avLst/>
+          </a:prstGeom>
+        </p:spPr>
+      </p:pic>
+    </p:spTree>
+    <p:extLst>
+      <p:ext uri="{BB962C8B-B14F-4D97-AF65-F5344CB8AC3E}">
+        <p14:creationId xmlns:p14="http://schemas.microsoft.com/office/powerpoint/2010/main" val="3785699315"/>
+      </p:ext>
+    </p:extLst>
+  </p:cSld>
+  <p:clrMapOvr>
+    <a:masterClrMapping/>
+  </p:clrMapOvr>
+  <mc:AlternateContent xmlns:mc="http://schemas.openxmlformats.org/markup-compatibility/2006">
+    <mc:Choice xmlns:p14="http://schemas.microsoft.com/office/powerpoint/2010/main" Requires="p14">
+      <p:transition p14:dur="10" advTm="30000">
+        <p:sndAc>
+          <p:stSnd>
+            <p:snd r:embed="rId2" name="click.wav"/>
+          </p:stSnd>
+        </p:sndAc>
+      </p:transition>
+    </mc:Choice>
+    <mc:Fallback>
+      <p:transition advTm="30000">
+        <p:sndAc>
+          <p:stSnd>
+            <p:snd r:embed="rId2" name="click.wav"/>
+          </p:stSnd>
+        </p:sndAc>
+      </p:transition>
+    </mc:Fallback>
+  </mc:AlternateContent>
+</p:sld>
+</file>
+
+<file path=ppt/slides/slide41.xml><?xml version="1.0" encoding="utf-8"?>
+<p:sld xmlns:a="http://schemas.openxmlformats.org/drawingml/2006/main" xmlns:r="http://schemas.openxmlformats.org/officeDocument/2006/relationships" xmlns:p="http://schemas.openxmlformats.org/presentationml/2006/main">
+  <p:cSld>
+    <p:spTree>
+      <p:nvGrpSpPr>
+        <p:cNvPr id="1" name="">
+          <a:extLst>
+            <a:ext uri="{FF2B5EF4-FFF2-40B4-BE49-F238E27FC236}">
+              <a16:creationId xmlns:a16="http://schemas.microsoft.com/office/drawing/2014/main" id="{F85F56AC-C439-8E4E-6156-288EEA4F2AA8}"/>
+            </a:ext>
+          </a:extLst>
+        </p:cNvPr>
+        <p:cNvGrpSpPr/>
+        <p:nvPr/>
+      </p:nvGrpSpPr>
+      <p:grpSpPr>
+        <a:xfrm>
+          <a:off x="0" y="0"/>
+          <a:ext cx="0" cy="0"/>
+          <a:chOff x="0" y="0"/>
+          <a:chExt cx="0" cy="0"/>
+        </a:xfrm>
+      </p:grpSpPr>
+      <p:pic>
+        <p:nvPicPr>
+          <p:cNvPr id="4" name="Picture 3">
+            <a:extLst>
+              <a:ext uri="{FF2B5EF4-FFF2-40B4-BE49-F238E27FC236}">
+                <a16:creationId xmlns:a16="http://schemas.microsoft.com/office/drawing/2014/main" id="{28E47BE4-F9F4-2811-08A1-7AC6BB6865E0}"/>
+              </a:ext>
+            </a:extLst>
+          </p:cNvPr>
+          <p:cNvPicPr>
+            <a:picLocks noChangeAspect="1"/>
+          </p:cNvPicPr>
+          <p:nvPr/>
+        </p:nvPicPr>
+        <p:blipFill>
+          <a:blip r:embed="rId3">
+            <a:extLst>
+              <a:ext uri="{28A0092B-C50C-407E-A947-70E740481C1C}">
+                <a14:useLocalDpi xmlns:a14="http://schemas.microsoft.com/office/drawing/2010/main" val="0"/>
+              </a:ext>
+            </a:extLst>
+          </a:blip>
+          <a:stretch>
+            <a:fillRect/>
+          </a:stretch>
+        </p:blipFill>
+        <p:spPr>
+          <a:xfrm>
+            <a:off x="1601603" y="0"/>
+            <a:ext cx="8988794" cy="6858000"/>
+          </a:xfrm>
+          <a:prstGeom prst="rect">
+            <a:avLst/>
+          </a:prstGeom>
+        </p:spPr>
+      </p:pic>
+    </p:spTree>
+    <p:extLst>
+      <p:ext uri="{BB962C8B-B14F-4D97-AF65-F5344CB8AC3E}">
+        <p14:creationId xmlns:p14="http://schemas.microsoft.com/office/powerpoint/2010/main" val="3425661854"/>
+      </p:ext>
+    </p:extLst>
+  </p:cSld>
+  <p:clrMapOvr>
+    <a:masterClrMapping/>
+  </p:clrMapOvr>
+  <mc:AlternateContent xmlns:mc="http://schemas.openxmlformats.org/markup-compatibility/2006">
+    <mc:Choice xmlns:p14="http://schemas.microsoft.com/office/powerpoint/2010/main" Requires="p14">
+      <p:transition p14:dur="10" advTm="30000">
+        <p:sndAc>
+          <p:stSnd>
+            <p:snd r:embed="rId2" name="click.wav"/>
+          </p:stSnd>
+        </p:sndAc>
+      </p:transition>
+    </mc:Choice>
+    <mc:Fallback>
+      <p:transition advTm="30000">
+        <p:sndAc>
+          <p:stSnd>
+            <p:snd r:embed="rId2" name="click.wav"/>
+          </p:stSnd>
+        </p:sndAc>
+      </p:transition>
+    </mc:Fallback>
+  </mc:AlternateContent>
+</p:sld>
+</file>
+
+<file path=ppt/slides/slide42.xml><?xml version="1.0" encoding="utf-8"?>
+<p:sld xmlns:a="http://schemas.openxmlformats.org/drawingml/2006/main" xmlns:r="http://schemas.openxmlformats.org/officeDocument/2006/relationships" xmlns:p="http://schemas.openxmlformats.org/presentationml/2006/main">
+  <p:cSld>
+    <p:spTree>
+      <p:nvGrpSpPr>
+        <p:cNvPr id="1" name="">
+          <a:extLst>
+            <a:ext uri="{FF2B5EF4-FFF2-40B4-BE49-F238E27FC236}">
+              <a16:creationId xmlns:a16="http://schemas.microsoft.com/office/drawing/2014/main" id="{07DEEF9D-805A-6202-AA50-B3DA106C5B24}"/>
+            </a:ext>
+          </a:extLst>
+        </p:cNvPr>
+        <p:cNvGrpSpPr/>
+        <p:nvPr/>
+      </p:nvGrpSpPr>
+      <p:grpSpPr>
+        <a:xfrm>
+          <a:off x="0" y="0"/>
+          <a:ext cx="0" cy="0"/>
+          <a:chOff x="0" y="0"/>
+          <a:chExt cx="0" cy="0"/>
+        </a:xfrm>
+      </p:grpSpPr>
+      <p:pic>
+        <p:nvPicPr>
+          <p:cNvPr id="3" name="Picture 2">
+            <a:extLst>
+              <a:ext uri="{FF2B5EF4-FFF2-40B4-BE49-F238E27FC236}">
+                <a16:creationId xmlns:a16="http://schemas.microsoft.com/office/drawing/2014/main" id="{44C1EB2C-5DE7-D5D6-ACAA-B42AC8C46C0E}"/>
+              </a:ext>
+            </a:extLst>
+          </p:cNvPr>
+          <p:cNvPicPr>
+            <a:picLocks noChangeAspect="1"/>
+          </p:cNvPicPr>
+          <p:nvPr/>
+        </p:nvPicPr>
+        <p:blipFill>
+          <a:blip r:embed="rId3">
+            <a:extLst>
+              <a:ext uri="{28A0092B-C50C-407E-A947-70E740481C1C}">
+                <a14:useLocalDpi xmlns:a14="http://schemas.microsoft.com/office/drawing/2010/main" val="0"/>
+              </a:ext>
+            </a:extLst>
+          </a:blip>
+          <a:stretch>
+            <a:fillRect/>
+          </a:stretch>
+        </p:blipFill>
+        <p:spPr>
+          <a:xfrm>
+            <a:off x="2099705" y="1814287"/>
+            <a:ext cx="7992590" cy="3229426"/>
+          </a:xfrm>
+          <a:prstGeom prst="rect">
+            <a:avLst/>
+          </a:prstGeom>
+        </p:spPr>
+      </p:pic>
+    </p:spTree>
+    <p:extLst>
+      <p:ext uri="{BB962C8B-B14F-4D97-AF65-F5344CB8AC3E}">
+        <p14:creationId xmlns:p14="http://schemas.microsoft.com/office/powerpoint/2010/main" val="115662504"/>
+      </p:ext>
+    </p:extLst>
+  </p:cSld>
+  <p:clrMapOvr>
+    <a:masterClrMapping/>
+  </p:clrMapOvr>
+  <mc:AlternateContent xmlns:mc="http://schemas.openxmlformats.org/markup-compatibility/2006">
+    <mc:Choice xmlns:p14="http://schemas.microsoft.com/office/powerpoint/2010/main" Requires="p14">
+      <p:transition p14:dur="10" advTm="30000">
+        <p:sndAc>
+          <p:stSnd>
+            <p:snd r:embed="rId2" name="click.wav"/>
+          </p:stSnd>
+        </p:sndAc>
+      </p:transition>
+    </mc:Choice>
+    <mc:Fallback>
+      <p:transition advTm="30000">
+        <p:sndAc>
+          <p:stSnd>
+            <p:snd r:embed="rId2" name="click.wav"/>
           </p:stSnd>
         </p:sndAc>
       </p:transition>
@@ -6752,8 +8696,8 @@
   <p:clrMapOvr>
     <a:masterClrMapping/>
   </p:clrMapOvr>
-  <mc:AlternateContent xmlns:mc="http://schemas.openxmlformats.org/markup-compatibility/2006">
-    <mc:Choice xmlns:p14="http://schemas.microsoft.com/office/powerpoint/2010/main" Requires="p14">
+  <mc:AlternateContent xmlns:mc="http://schemas.openxmlformats.org/markup-compatibility/2006" xmlns:p14="http://schemas.microsoft.com/office/powerpoint/2010/main">
+    <mc:Choice Requires="p14">
       <p:transition p14:dur="10" advTm="30000">
         <p:sndAc>
           <p:stSnd>
@@ -6762,11 +8706,11 @@
         </p:sndAc>
       </p:transition>
     </mc:Choice>
-    <mc:Fallback>
+    <mc:Fallback xmlns="">
       <p:transition advTm="30000">
         <p:sndAc>
           <p:stSnd>
-            <p:snd r:embed="rId2" name="click.wav"/>
+            <p:snd r:embed="rId4" name="click.wav"/>
           </p:stSnd>
         </p:sndAc>
       </p:transition>
